--- a/Task/Stimuli/Instructions/Instructions.pptx
+++ b/Task/Stimuli/Instructions/Instructions.pptx
@@ -8,13 +8,13 @@
     <p:notesMasterId r:id="rId9"/>
   </p:notesMasterIdLst>
   <p:sldIdLst>
-    <p:sldId id="266" r:id="rId2"/>
-    <p:sldId id="280" r:id="rId3"/>
-    <p:sldId id="281" r:id="rId4"/>
-    <p:sldId id="279" r:id="rId5"/>
-    <p:sldId id="285" r:id="rId6"/>
-    <p:sldId id="287" r:id="rId7"/>
-    <p:sldId id="282" r:id="rId8"/>
+    <p:sldId id="279" r:id="rId2"/>
+    <p:sldId id="285" r:id="rId3"/>
+    <p:sldId id="287" r:id="rId4"/>
+    <p:sldId id="282" r:id="rId5"/>
+    <p:sldId id="266" r:id="rId6"/>
+    <p:sldId id="280" r:id="rId7"/>
+    <p:sldId id="281" r:id="rId8"/>
   </p:sldIdLst>
   <p:sldSz cx="12192000" cy="6858000"/>
   <p:notesSz cx="6858000" cy="9144000"/>
@@ -544,7 +544,7 @@
     </p:spTree>
     <p:extLst>
       <p:ext uri="{BB962C8B-B14F-4D97-AF65-F5344CB8AC3E}">
-        <p14:creationId xmlns:p14="http://schemas.microsoft.com/office/powerpoint/2010/main" val="1857249076"/>
+        <p14:creationId xmlns:p14="http://schemas.microsoft.com/office/powerpoint/2010/main" val="3086984445"/>
       </p:ext>
     </p:extLst>
   </p:cSld>
@@ -628,7 +628,7 @@
     </p:spTree>
     <p:extLst>
       <p:ext uri="{BB962C8B-B14F-4D97-AF65-F5344CB8AC3E}">
-        <p14:creationId xmlns:p14="http://schemas.microsoft.com/office/powerpoint/2010/main" val="2129410065"/>
+        <p14:creationId xmlns:p14="http://schemas.microsoft.com/office/powerpoint/2010/main" val="1068194442"/>
       </p:ext>
     </p:extLst>
   </p:cSld>
@@ -712,7 +712,7 @@
     </p:spTree>
     <p:extLst>
       <p:ext uri="{BB962C8B-B14F-4D97-AF65-F5344CB8AC3E}">
-        <p14:creationId xmlns:p14="http://schemas.microsoft.com/office/powerpoint/2010/main" val="4018897789"/>
+        <p14:creationId xmlns:p14="http://schemas.microsoft.com/office/powerpoint/2010/main" val="4117889491"/>
       </p:ext>
     </p:extLst>
   </p:cSld>
@@ -796,7 +796,7 @@
     </p:spTree>
     <p:extLst>
       <p:ext uri="{BB962C8B-B14F-4D97-AF65-F5344CB8AC3E}">
-        <p14:creationId xmlns:p14="http://schemas.microsoft.com/office/powerpoint/2010/main" val="3086984445"/>
+        <p14:creationId xmlns:p14="http://schemas.microsoft.com/office/powerpoint/2010/main" val="3312244956"/>
       </p:ext>
     </p:extLst>
   </p:cSld>
@@ -880,7 +880,7 @@
     </p:spTree>
     <p:extLst>
       <p:ext uri="{BB962C8B-B14F-4D97-AF65-F5344CB8AC3E}">
-        <p14:creationId xmlns:p14="http://schemas.microsoft.com/office/powerpoint/2010/main" val="1068194442"/>
+        <p14:creationId xmlns:p14="http://schemas.microsoft.com/office/powerpoint/2010/main" val="1857249076"/>
       </p:ext>
     </p:extLst>
   </p:cSld>
@@ -964,7 +964,7 @@
     </p:spTree>
     <p:extLst>
       <p:ext uri="{BB962C8B-B14F-4D97-AF65-F5344CB8AC3E}">
-        <p14:creationId xmlns:p14="http://schemas.microsoft.com/office/powerpoint/2010/main" val="4117889491"/>
+        <p14:creationId xmlns:p14="http://schemas.microsoft.com/office/powerpoint/2010/main" val="2129410065"/>
       </p:ext>
     </p:extLst>
   </p:cSld>
@@ -1048,7 +1048,7 @@
     </p:spTree>
     <p:extLst>
       <p:ext uri="{BB962C8B-B14F-4D97-AF65-F5344CB8AC3E}">
-        <p14:creationId xmlns:p14="http://schemas.microsoft.com/office/powerpoint/2010/main" val="3312244956"/>
+        <p14:creationId xmlns:p14="http://schemas.microsoft.com/office/powerpoint/2010/main" val="4018897789"/>
       </p:ext>
     </p:extLst>
   </p:cSld>
@@ -4324,40 +4324,123 @@
           </a:p>
         </p:txBody>
       </p:sp>
-      <p:pic>
-        <p:nvPicPr>
-          <p:cNvPr id="7" name="Picture 6">
-            <a:extLst>
-              <a:ext uri="{FF2B5EF4-FFF2-40B4-BE49-F238E27FC236}">
-                <a16:creationId xmlns:a16="http://schemas.microsoft.com/office/drawing/2014/main" id="{50AAA599-E202-233D-CEBF-2A4936DD41FE}"/>
-              </a:ext>
-            </a:extLst>
-          </p:cNvPr>
-          <p:cNvPicPr>
-            <a:picLocks noChangeAspect="1"/>
-          </p:cNvPicPr>
+      <p:sp>
+        <p:nvSpPr>
+          <p:cNvPr id="8" name="Rectangle 7">
+            <a:extLst>
+              <a:ext uri="{FF2B5EF4-FFF2-40B4-BE49-F238E27FC236}">
+                <a16:creationId xmlns:a16="http://schemas.microsoft.com/office/drawing/2014/main" id="{1FF0DAA0-A0FD-6A46-9490-CA00AB61643F}"/>
+              </a:ext>
+            </a:extLst>
+          </p:cNvPr>
+          <p:cNvSpPr/>
           <p:nvPr/>
-        </p:nvPicPr>
-        <p:blipFill>
-          <a:blip r:embed="rId3"/>
-          <a:stretch>
-            <a:fillRect/>
-          </a:stretch>
-        </p:blipFill>
-        <p:spPr>
-          <a:xfrm>
-            <a:off x="4778202" y="1952368"/>
-            <a:ext cx="2885993" cy="2737391"/>
+        </p:nvSpPr>
+        <p:spPr>
+          <a:xfrm>
+            <a:off x="650009" y="654162"/>
+            <a:ext cx="11146420" cy="2031325"/>
           </a:xfrm>
           <a:prstGeom prst="rect">
             <a:avLst/>
           </a:prstGeom>
         </p:spPr>
-      </p:pic>
+        <p:txBody>
+          <a:bodyPr wrap="square">
+            <a:spAutoFit/>
+          </a:bodyPr>
+          <a:lstStyle/>
+          <a:p>
+            <a:pPr algn="ctr"/>
+            <a:r>
+              <a:rPr lang="en-US" dirty="0">
+                <a:solidFill>
+                  <a:schemeClr val="bg1"/>
+                </a:solidFill>
+                <a:latin typeface="Arial" panose="020B0604020202020204" pitchFamily="34" charset="0"/>
+                <a:cs typeface="Arial" panose="020B0604020202020204" pitchFamily="34" charset="0"/>
+              </a:rPr>
+              <a:t>Welcome to the experiment!</a:t>
+            </a:r>
+          </a:p>
+          <a:p>
+            <a:pPr algn="ctr"/>
+            <a:endParaRPr lang="en-US" dirty="0">
+              <a:solidFill>
+                <a:schemeClr val="bg1"/>
+              </a:solidFill>
+              <a:latin typeface="Arial" panose="020B0604020202020204" pitchFamily="34" charset="0"/>
+              <a:cs typeface="Arial" panose="020B0604020202020204" pitchFamily="34" charset="0"/>
+            </a:endParaRPr>
+          </a:p>
+          <a:p>
+            <a:pPr algn="ctr"/>
+            <a:r>
+              <a:rPr lang="en-US" dirty="0">
+                <a:solidFill>
+                  <a:schemeClr val="bg1"/>
+                </a:solidFill>
+                <a:latin typeface="Arial" panose="020B0604020202020204" pitchFamily="34" charset="0"/>
+                <a:cs typeface="Arial" panose="020B0604020202020204" pitchFamily="34" charset="0"/>
+              </a:rPr>
+              <a:t>In this experiment, we will show you pairs of images presented one after the other. </a:t>
+            </a:r>
+          </a:p>
+          <a:p>
+            <a:pPr algn="ctr"/>
+            <a:r>
+              <a:rPr lang="en-US" dirty="0">
+                <a:solidFill>
+                  <a:schemeClr val="bg1"/>
+                </a:solidFill>
+                <a:latin typeface="Arial" panose="020B0604020202020204" pitchFamily="34" charset="0"/>
+                <a:cs typeface="Arial" panose="020B0604020202020204" pitchFamily="34" charset="0"/>
+              </a:rPr>
+              <a:t>Your task is to decide which one is the Correct one. </a:t>
+            </a:r>
+          </a:p>
+          <a:p>
+            <a:pPr algn="ctr"/>
+            <a:endParaRPr lang="en-US" dirty="0">
+              <a:solidFill>
+                <a:schemeClr val="bg1"/>
+              </a:solidFill>
+              <a:latin typeface="Arial" panose="020B0604020202020204" pitchFamily="34" charset="0"/>
+              <a:cs typeface="Arial" panose="020B0604020202020204" pitchFamily="34" charset="0"/>
+            </a:endParaRPr>
+          </a:p>
+          <a:p>
+            <a:pPr algn="ctr"/>
+            <a:r>
+              <a:rPr lang="en-US" dirty="0">
+                <a:solidFill>
+                  <a:srgbClr val="808080"/>
+                </a:solidFill>
+                <a:latin typeface="Arial" panose="020B0604020202020204" pitchFamily="34" charset="0"/>
+                <a:cs typeface="Arial" panose="020B0604020202020204" pitchFamily="34" charset="0"/>
+              </a:rPr>
+              <a:t>The two images will appear one after the other.</a:t>
+            </a:r>
+          </a:p>
+          <a:p>
+            <a:pPr algn="ctr"/>
+            <a:r>
+              <a:rPr lang="en-US" dirty="0">
+                <a:solidFill>
+                  <a:srgbClr val="808080"/>
+                </a:solidFill>
+                <a:latin typeface="Arial" panose="020B0604020202020204" pitchFamily="34" charset="0"/>
+                <a:cs typeface="Arial" panose="020B0604020202020204" pitchFamily="34" charset="0"/>
+              </a:rPr>
+              <a:t> When you see a ”+” sign on the screen, you may enter either the “D” or “K” keys to make a decision.</a:t>
+            </a:r>
+          </a:p>
+        </p:txBody>
+      </p:sp>
     </p:spTree>
     <p:extLst>
       <p:ext uri="{BB962C8B-B14F-4D97-AF65-F5344CB8AC3E}">
-        <p14:creationId xmlns:p14="http://schemas.microsoft.com/office/powerpoint/2010/main" val="1511443662"/>
+        <p14:creationId xmlns:p14="http://schemas.microsoft.com/office/powerpoint/2010/main" val="425262015"/>
       </p:ext>
     </p:extLst>
   </p:cSld>
@@ -4436,72 +4519,125 @@
           </a:p>
         </p:txBody>
       </p:sp>
-      <p:pic>
-        <p:nvPicPr>
-          <p:cNvPr id="2" name="Picture 1">
-            <a:extLst>
-              <a:ext uri="{FF2B5EF4-FFF2-40B4-BE49-F238E27FC236}">
-                <a16:creationId xmlns:a16="http://schemas.microsoft.com/office/drawing/2014/main" id="{E0DF0AC2-3597-2ECC-9B56-1D9EFBED2BB8}"/>
-              </a:ext>
-            </a:extLst>
-          </p:cNvPr>
-          <p:cNvPicPr>
-            <a:picLocks noChangeAspect="1"/>
-          </p:cNvPicPr>
+      <p:sp>
+        <p:nvSpPr>
+          <p:cNvPr id="8" name="Rectangle 7">
+            <a:extLst>
+              <a:ext uri="{FF2B5EF4-FFF2-40B4-BE49-F238E27FC236}">
+                <a16:creationId xmlns:a16="http://schemas.microsoft.com/office/drawing/2014/main" id="{1FF0DAA0-A0FD-6A46-9490-CA00AB61643F}"/>
+              </a:ext>
+            </a:extLst>
+          </p:cNvPr>
+          <p:cNvSpPr/>
           <p:nvPr/>
-        </p:nvPicPr>
-        <p:blipFill>
-          <a:blip r:embed="rId3"/>
-          <a:stretch>
-            <a:fillRect/>
-          </a:stretch>
-        </p:blipFill>
-        <p:spPr>
-          <a:xfrm>
-            <a:off x="5016995" y="2284317"/>
-            <a:ext cx="2158009" cy="2289366"/>
+        </p:nvSpPr>
+        <p:spPr>
+          <a:xfrm>
+            <a:off x="650009" y="654162"/>
+            <a:ext cx="11146420" cy="2031325"/>
           </a:xfrm>
           <a:prstGeom prst="rect">
             <a:avLst/>
           </a:prstGeom>
         </p:spPr>
-      </p:pic>
-    </p:spTree>
-    <p:extLst>
-      <p:ext uri="{BB962C8B-B14F-4D97-AF65-F5344CB8AC3E}">
-        <p14:creationId xmlns:p14="http://schemas.microsoft.com/office/powerpoint/2010/main" val="90626636"/>
-      </p:ext>
-    </p:extLst>
-  </p:cSld>
-  <p:clrMapOvr>
-    <a:masterClrMapping/>
-  </p:clrMapOvr>
-</p:sld>
-</file>
-
-<file path=ppt/slides/slide3.xml><?xml version="1.0" encoding="utf-8"?>
-<p:sld xmlns:a="http://schemas.openxmlformats.org/drawingml/2006/main" xmlns:r="http://schemas.openxmlformats.org/officeDocument/2006/relationships" xmlns:p="http://schemas.openxmlformats.org/presentationml/2006/main">
-  <p:cSld>
-    <p:spTree>
-      <p:nvGrpSpPr>
-        <p:cNvPr id="1" name=""/>
-        <p:cNvGrpSpPr/>
-        <p:nvPr/>
-      </p:nvGrpSpPr>
-      <p:grpSpPr>
-        <a:xfrm>
-          <a:off x="0" y="0"/>
-          <a:ext cx="0" cy="0"/>
-          <a:chOff x="0" y="0"/>
-          <a:chExt cx="0" cy="0"/>
-        </a:xfrm>
-      </p:grpSpPr>
-      <p:sp>
-        <p:nvSpPr>
-          <p:cNvPr id="4" name="Rectangle 3">
-            <a:extLst>
-              <a:ext uri="{FF2B5EF4-FFF2-40B4-BE49-F238E27FC236}">
-                <a16:creationId xmlns:a16="http://schemas.microsoft.com/office/drawing/2014/main" id="{01836649-3BFB-BC41-8DB9-D358D1B458BD}"/>
+        <p:txBody>
+          <a:bodyPr wrap="square">
+            <a:spAutoFit/>
+          </a:bodyPr>
+          <a:lstStyle/>
+          <a:p>
+            <a:pPr algn="ctr"/>
+            <a:r>
+              <a:rPr lang="en-US" dirty="0">
+                <a:solidFill>
+                  <a:schemeClr val="bg1"/>
+                </a:solidFill>
+                <a:latin typeface="Arial" panose="020B0604020202020204" pitchFamily="34" charset="0"/>
+                <a:cs typeface="Arial" panose="020B0604020202020204" pitchFamily="34" charset="0"/>
+              </a:rPr>
+              <a:t>Welcome to the experiment!</a:t>
+            </a:r>
+          </a:p>
+          <a:p>
+            <a:pPr algn="ctr"/>
+            <a:endParaRPr lang="en-US" dirty="0">
+              <a:solidFill>
+                <a:schemeClr val="bg1"/>
+              </a:solidFill>
+              <a:latin typeface="Arial" panose="020B0604020202020204" pitchFamily="34" charset="0"/>
+              <a:cs typeface="Arial" panose="020B0604020202020204" pitchFamily="34" charset="0"/>
+            </a:endParaRPr>
+          </a:p>
+          <a:p>
+            <a:pPr algn="ctr"/>
+            <a:r>
+              <a:rPr lang="en-US" dirty="0">
+                <a:solidFill>
+                  <a:schemeClr val="bg1"/>
+                </a:solidFill>
+                <a:latin typeface="Arial" panose="020B0604020202020204" pitchFamily="34" charset="0"/>
+                <a:cs typeface="Arial" panose="020B0604020202020204" pitchFamily="34" charset="0"/>
+              </a:rPr>
+              <a:t>In this experiment, we will show you pairs of images presented one after the other. </a:t>
+            </a:r>
+          </a:p>
+          <a:p>
+            <a:pPr algn="ctr"/>
+            <a:r>
+              <a:rPr lang="en-US" dirty="0">
+                <a:solidFill>
+                  <a:schemeClr val="bg1"/>
+                </a:solidFill>
+                <a:latin typeface="Arial" panose="020B0604020202020204" pitchFamily="34" charset="0"/>
+                <a:cs typeface="Arial" panose="020B0604020202020204" pitchFamily="34" charset="0"/>
+              </a:rPr>
+              <a:t>Your task is to decide which one is the Correct one. </a:t>
+            </a:r>
+          </a:p>
+          <a:p>
+            <a:pPr algn="ctr"/>
+            <a:endParaRPr lang="en-US" dirty="0">
+              <a:solidFill>
+                <a:schemeClr val="bg1"/>
+              </a:solidFill>
+              <a:latin typeface="Arial" panose="020B0604020202020204" pitchFamily="34" charset="0"/>
+              <a:cs typeface="Arial" panose="020B0604020202020204" pitchFamily="34" charset="0"/>
+            </a:endParaRPr>
+          </a:p>
+          <a:p>
+            <a:pPr algn="ctr"/>
+            <a:r>
+              <a:rPr lang="en-US" dirty="0">
+                <a:solidFill>
+                  <a:schemeClr val="bg1"/>
+                </a:solidFill>
+                <a:latin typeface="Arial" panose="020B0604020202020204" pitchFamily="34" charset="0"/>
+                <a:cs typeface="Arial" panose="020B0604020202020204" pitchFamily="34" charset="0"/>
+              </a:rPr>
+              <a:t>Two images will appear one after the other, with a “+” in between.</a:t>
+            </a:r>
+          </a:p>
+          <a:p>
+            <a:pPr algn="ctr"/>
+            <a:r>
+              <a:rPr lang="en-US" dirty="0">
+                <a:solidFill>
+                  <a:schemeClr val="bg1"/>
+                </a:solidFill>
+                <a:latin typeface="Arial" panose="020B0604020202020204" pitchFamily="34" charset="0"/>
+                <a:cs typeface="Arial" panose="020B0604020202020204" pitchFamily="34" charset="0"/>
+              </a:rPr>
+              <a:t> When you see the prompt “MAKE A CHOICE”, you may enter either the “D” or “K” keys to make a decision.</a:t>
+            </a:r>
+          </a:p>
+        </p:txBody>
+      </p:sp>
+      <p:sp>
+        <p:nvSpPr>
+          <p:cNvPr id="28" name="Rectangle 27">
+            <a:extLst>
+              <a:ext uri="{FF2B5EF4-FFF2-40B4-BE49-F238E27FC236}">
+                <a16:creationId xmlns:a16="http://schemas.microsoft.com/office/drawing/2014/main" id="{E4D16A73-0858-319F-16EF-D555589794DF}"/>
               </a:ext>
             </a:extLst>
           </p:cNvPr>
@@ -4510,8 +4646,8 @@
         </p:nvSpPr>
         <p:spPr>
           <a:xfrm>
-            <a:off x="0" y="0"/>
-            <a:ext cx="12192000" cy="6858000"/>
+            <a:off x="3550925" y="3212822"/>
+            <a:ext cx="2365960" cy="1879430"/>
           </a:xfrm>
           <a:prstGeom prst="rect">
             <a:avLst/>
@@ -4519,8 +4655,10 @@
           <a:solidFill>
             <a:srgbClr val="808080"/>
           </a:solidFill>
-          <a:ln>
-            <a:noFill/>
+          <a:ln w="28575">
+            <a:solidFill>
+              <a:schemeClr val="tx1"/>
+            </a:solidFill>
           </a:ln>
         </p:spPr>
         <p:style>
@@ -4544,16 +4682,60 @@
           <a:lstStyle/>
           <a:p>
             <a:pPr marL="0" algn="ctr" defTabSz="914400" rtl="0" eaLnBrk="1" latinLnBrk="0" hangingPunct="1"/>
-            <a:endParaRPr lang="en-US" dirty="0"/>
-          </a:p>
-        </p:txBody>
-      </p:sp>
-      <p:sp>
-        <p:nvSpPr>
-          <p:cNvPr id="3" name="Rectangle 2">
-            <a:extLst>
-              <a:ext uri="{FF2B5EF4-FFF2-40B4-BE49-F238E27FC236}">
-                <a16:creationId xmlns:a16="http://schemas.microsoft.com/office/drawing/2014/main" id="{003FFE66-834B-F04E-8725-B3E647606348}"/>
+            <a:endParaRPr lang="en-US"/>
+          </a:p>
+        </p:txBody>
+      </p:sp>
+      <p:cxnSp>
+        <p:nvCxnSpPr>
+          <p:cNvPr id="29" name="Straight Arrow Connector 28">
+            <a:extLst>
+              <a:ext uri="{FF2B5EF4-FFF2-40B4-BE49-F238E27FC236}">
+                <a16:creationId xmlns:a16="http://schemas.microsoft.com/office/drawing/2014/main" id="{636381C2-DE22-C720-C04D-7F6C724F9C75}"/>
+              </a:ext>
+            </a:extLst>
+          </p:cNvPr>
+          <p:cNvCxnSpPr>
+            <a:cxnSpLocks/>
+          </p:cNvCxnSpPr>
+          <p:nvPr/>
+        </p:nvCxnSpPr>
+        <p:spPr>
+          <a:xfrm>
+            <a:off x="5933354" y="4142568"/>
+            <a:ext cx="274320" cy="0"/>
+          </a:xfrm>
+          <a:prstGeom prst="straightConnector1">
+            <a:avLst/>
+          </a:prstGeom>
+          <a:ln w="57150">
+            <a:solidFill>
+              <a:schemeClr val="tx1"/>
+            </a:solidFill>
+            <a:tailEnd type="triangle"/>
+          </a:ln>
+        </p:spPr>
+        <p:style>
+          <a:lnRef idx="1">
+            <a:schemeClr val="accent1"/>
+          </a:lnRef>
+          <a:fillRef idx="0">
+            <a:schemeClr val="accent1"/>
+          </a:fillRef>
+          <a:effectRef idx="0">
+            <a:schemeClr val="accent1"/>
+          </a:effectRef>
+          <a:fontRef idx="minor">
+            <a:schemeClr val="tx1"/>
+          </a:fontRef>
+        </p:style>
+      </p:cxnSp>
+      <p:sp>
+        <p:nvSpPr>
+          <p:cNvPr id="30" name="Rectangle 29">
+            <a:extLst>
+              <a:ext uri="{FF2B5EF4-FFF2-40B4-BE49-F238E27FC236}">
+                <a16:creationId xmlns:a16="http://schemas.microsoft.com/office/drawing/2014/main" id="{5F7DA9A9-7BB2-1C07-C53F-35537DC78A3F}"/>
               </a:ext>
             </a:extLst>
           </p:cNvPr>
@@ -4562,17 +4744,19 @@
         </p:nvSpPr>
         <p:spPr>
           <a:xfrm>
-            <a:off x="4998720" y="2242751"/>
-            <a:ext cx="2194560" cy="2193325"/>
+            <a:off x="6224143" y="3212822"/>
+            <a:ext cx="2365960" cy="1879430"/>
           </a:xfrm>
           <a:prstGeom prst="rect">
             <a:avLst/>
           </a:prstGeom>
           <a:solidFill>
-            <a:schemeClr val="tx1"/>
+            <a:srgbClr val="808080"/>
           </a:solidFill>
-          <a:ln>
-            <a:noFill/>
+          <a:ln w="28575">
+            <a:solidFill>
+              <a:schemeClr val="tx1"/>
+            </a:solidFill>
           </a:ln>
         </p:spPr>
         <p:style>
@@ -4595,47 +4779,17 @@
           <a:bodyPr rtlCol="0" anchor="ctr"/>
           <a:lstStyle/>
           <a:p>
-            <a:pPr algn="ctr"/>
+            <a:pPr marL="0" algn="ctr" defTabSz="914400" rtl="0" eaLnBrk="1" latinLnBrk="0" hangingPunct="1"/>
             <a:endParaRPr lang="en-US"/>
           </a:p>
         </p:txBody>
       </p:sp>
-    </p:spTree>
-    <p:extLst>
-      <p:ext uri="{BB962C8B-B14F-4D97-AF65-F5344CB8AC3E}">
-        <p14:creationId xmlns:p14="http://schemas.microsoft.com/office/powerpoint/2010/main" val="196050107"/>
-      </p:ext>
-    </p:extLst>
-  </p:cSld>
-  <p:clrMapOvr>
-    <a:masterClrMapping/>
-  </p:clrMapOvr>
-</p:sld>
-</file>
-
-<file path=ppt/slides/slide4.xml><?xml version="1.0" encoding="utf-8"?>
-<p:sld xmlns:a="http://schemas.openxmlformats.org/drawingml/2006/main" xmlns:r="http://schemas.openxmlformats.org/officeDocument/2006/relationships" xmlns:p="http://schemas.openxmlformats.org/presentationml/2006/main">
-  <p:cSld>
-    <p:spTree>
-      <p:nvGrpSpPr>
-        <p:cNvPr id="1" name=""/>
-        <p:cNvGrpSpPr/>
-        <p:nvPr/>
-      </p:nvGrpSpPr>
-      <p:grpSpPr>
-        <a:xfrm>
-          <a:off x="0" y="0"/>
-          <a:ext cx="0" cy="0"/>
-          <a:chOff x="0" y="0"/>
-          <a:chExt cx="0" cy="0"/>
-        </a:xfrm>
-      </p:grpSpPr>
-      <p:sp>
-        <p:nvSpPr>
-          <p:cNvPr id="4" name="Rectangle 3">
-            <a:extLst>
-              <a:ext uri="{FF2B5EF4-FFF2-40B4-BE49-F238E27FC236}">
-                <a16:creationId xmlns:a16="http://schemas.microsoft.com/office/drawing/2014/main" id="{01836649-3BFB-BC41-8DB9-D358D1B458BD}"/>
+      <p:sp>
+        <p:nvSpPr>
+          <p:cNvPr id="33" name="Rectangle 32">
+            <a:extLst>
+              <a:ext uri="{FF2B5EF4-FFF2-40B4-BE49-F238E27FC236}">
+                <a16:creationId xmlns:a16="http://schemas.microsoft.com/office/drawing/2014/main" id="{20ACA483-BA3C-3519-D40C-70BCD9149BE4}"/>
               </a:ext>
             </a:extLst>
           </p:cNvPr>
@@ -4644,17 +4798,21 @@
         </p:nvSpPr>
         <p:spPr>
           <a:xfrm>
-            <a:off x="0" y="0"/>
-            <a:ext cx="12192000" cy="6858000"/>
+            <a:off x="6876363" y="3611776"/>
+            <a:ext cx="1097280" cy="1097280"/>
           </a:xfrm>
           <a:prstGeom prst="rect">
             <a:avLst/>
           </a:prstGeom>
           <a:solidFill>
-            <a:srgbClr val="808080"/>
+            <a:schemeClr val="bg1"/>
           </a:solidFill>
           <a:ln>
-            <a:noFill/>
+            <a:solidFill>
+              <a:schemeClr val="bg1">
+                <a:lumMod val="85000"/>
+              </a:schemeClr>
+            </a:solidFill>
           </a:ln>
         </p:spPr>
         <p:style>
@@ -4677,160 +4835,91 @@
           <a:bodyPr rtlCol="0" anchor="ctr"/>
           <a:lstStyle/>
           <a:p>
-            <a:pPr marL="0" algn="ctr" defTabSz="914400" rtl="0" eaLnBrk="1" latinLnBrk="0" hangingPunct="1"/>
-            <a:endParaRPr lang="en-US" dirty="0"/>
-          </a:p>
-        </p:txBody>
-      </p:sp>
-      <p:sp>
-        <p:nvSpPr>
-          <p:cNvPr id="8" name="Rectangle 7">
-            <a:extLst>
-              <a:ext uri="{FF2B5EF4-FFF2-40B4-BE49-F238E27FC236}">
-                <a16:creationId xmlns:a16="http://schemas.microsoft.com/office/drawing/2014/main" id="{1FF0DAA0-A0FD-6A46-9490-CA00AB61643F}"/>
-              </a:ext>
-            </a:extLst>
-          </p:cNvPr>
-          <p:cNvSpPr/>
+            <a:pPr algn="ctr"/>
+            <a:endParaRPr lang="en-US"/>
+          </a:p>
+        </p:txBody>
+      </p:sp>
+      <p:pic>
+        <p:nvPicPr>
+          <p:cNvPr id="34" name="Picture 33">
+            <a:extLst>
+              <a:ext uri="{FF2B5EF4-FFF2-40B4-BE49-F238E27FC236}">
+                <a16:creationId xmlns:a16="http://schemas.microsoft.com/office/drawing/2014/main" id="{EF67E4BC-C004-405E-567C-FE609CFD5630}"/>
+              </a:ext>
+            </a:extLst>
+          </p:cNvPr>
+          <p:cNvPicPr>
+            <a:picLocks noChangeAspect="1"/>
+          </p:cNvPicPr>
           <p:nvPr/>
-        </p:nvSpPr>
-        <p:spPr>
-          <a:xfrm>
-            <a:off x="650009" y="654162"/>
-            <a:ext cx="11146420" cy="2031325"/>
+        </p:nvPicPr>
+        <p:blipFill>
+          <a:blip r:embed="rId3"/>
+          <a:stretch>
+            <a:fillRect/>
+          </a:stretch>
+        </p:blipFill>
+        <p:spPr>
+          <a:xfrm>
+            <a:off x="6972173" y="3703216"/>
+            <a:ext cx="914400" cy="914400"/>
           </a:xfrm>
           <a:prstGeom prst="rect">
             <a:avLst/>
           </a:prstGeom>
         </p:spPr>
-        <p:txBody>
-          <a:bodyPr wrap="square">
-            <a:spAutoFit/>
-          </a:bodyPr>
-          <a:lstStyle/>
-          <a:p>
-            <a:pPr algn="ctr"/>
-            <a:r>
-              <a:rPr lang="en-US" dirty="0">
-                <a:solidFill>
-                  <a:schemeClr val="bg1"/>
-                </a:solidFill>
-                <a:latin typeface="Arial" panose="020B0604020202020204" pitchFamily="34" charset="0"/>
-                <a:cs typeface="Arial" panose="020B0604020202020204" pitchFamily="34" charset="0"/>
-              </a:rPr>
-              <a:t>Welcome to the experiment!</a:t>
-            </a:r>
-          </a:p>
-          <a:p>
-            <a:pPr algn="ctr"/>
-            <a:endParaRPr lang="en-US" dirty="0">
-              <a:solidFill>
-                <a:schemeClr val="bg1"/>
-              </a:solidFill>
-              <a:latin typeface="Arial" panose="020B0604020202020204" pitchFamily="34" charset="0"/>
-              <a:cs typeface="Arial" panose="020B0604020202020204" pitchFamily="34" charset="0"/>
-            </a:endParaRPr>
-          </a:p>
-          <a:p>
-            <a:pPr algn="ctr"/>
-            <a:r>
-              <a:rPr lang="en-US" dirty="0">
-                <a:solidFill>
-                  <a:schemeClr val="bg1"/>
-                </a:solidFill>
-                <a:latin typeface="Arial" panose="020B0604020202020204" pitchFamily="34" charset="0"/>
-                <a:cs typeface="Arial" panose="020B0604020202020204" pitchFamily="34" charset="0"/>
-              </a:rPr>
-              <a:t>In this experiment, we will show you pairs of images presented one after the other. </a:t>
-            </a:r>
-          </a:p>
-          <a:p>
-            <a:pPr algn="ctr"/>
-            <a:r>
-              <a:rPr lang="en-US" dirty="0">
-                <a:solidFill>
-                  <a:schemeClr val="bg1"/>
-                </a:solidFill>
-                <a:latin typeface="Arial" panose="020B0604020202020204" pitchFamily="34" charset="0"/>
-                <a:cs typeface="Arial" panose="020B0604020202020204" pitchFamily="34" charset="0"/>
-              </a:rPr>
-              <a:t>Your task is to decide which one is the Correct one. </a:t>
-            </a:r>
-          </a:p>
-          <a:p>
-            <a:pPr algn="ctr"/>
-            <a:endParaRPr lang="en-US" dirty="0">
-              <a:solidFill>
-                <a:schemeClr val="bg1"/>
-              </a:solidFill>
-              <a:latin typeface="Arial" panose="020B0604020202020204" pitchFamily="34" charset="0"/>
-              <a:cs typeface="Arial" panose="020B0604020202020204" pitchFamily="34" charset="0"/>
-            </a:endParaRPr>
-          </a:p>
-          <a:p>
-            <a:pPr algn="ctr"/>
-            <a:r>
-              <a:rPr lang="en-US" dirty="0">
-                <a:solidFill>
-                  <a:srgbClr val="808080"/>
-                </a:solidFill>
-                <a:latin typeface="Arial" panose="020B0604020202020204" pitchFamily="34" charset="0"/>
-                <a:cs typeface="Arial" panose="020B0604020202020204" pitchFamily="34" charset="0"/>
-              </a:rPr>
-              <a:t>The two images will appear one after the other.</a:t>
-            </a:r>
-          </a:p>
-          <a:p>
-            <a:pPr algn="ctr"/>
-            <a:r>
-              <a:rPr lang="en-US" dirty="0">
-                <a:solidFill>
-                  <a:srgbClr val="808080"/>
-                </a:solidFill>
-                <a:latin typeface="Arial" panose="020B0604020202020204" pitchFamily="34" charset="0"/>
-                <a:cs typeface="Arial" panose="020B0604020202020204" pitchFamily="34" charset="0"/>
-              </a:rPr>
-              <a:t> When you see a ”+” sign on the screen, you may enter either the “D” or “K” keys to make a decision.</a:t>
-            </a:r>
-          </a:p>
-        </p:txBody>
-      </p:sp>
-    </p:spTree>
-    <p:extLst>
-      <p:ext uri="{BB962C8B-B14F-4D97-AF65-F5344CB8AC3E}">
-        <p14:creationId xmlns:p14="http://schemas.microsoft.com/office/powerpoint/2010/main" val="425262015"/>
-      </p:ext>
-    </p:extLst>
-  </p:cSld>
-  <p:clrMapOvr>
-    <a:masterClrMapping/>
-  </p:clrMapOvr>
-</p:sld>
-</file>
-
-<file path=ppt/slides/slide5.xml><?xml version="1.0" encoding="utf-8"?>
-<p:sld xmlns:a="http://schemas.openxmlformats.org/drawingml/2006/main" xmlns:r="http://schemas.openxmlformats.org/officeDocument/2006/relationships" xmlns:p="http://schemas.openxmlformats.org/presentationml/2006/main">
-  <p:cSld>
-    <p:spTree>
-      <p:nvGrpSpPr>
-        <p:cNvPr id="1" name=""/>
-        <p:cNvGrpSpPr/>
-        <p:nvPr/>
-      </p:nvGrpSpPr>
-      <p:grpSpPr>
-        <a:xfrm>
-          <a:off x="0" y="0"/>
-          <a:ext cx="0" cy="0"/>
-          <a:chOff x="0" y="0"/>
-          <a:chExt cx="0" cy="0"/>
-        </a:xfrm>
-      </p:grpSpPr>
-      <p:sp>
-        <p:nvSpPr>
-          <p:cNvPr id="4" name="Rectangle 3">
-            <a:extLst>
-              <a:ext uri="{FF2B5EF4-FFF2-40B4-BE49-F238E27FC236}">
-                <a16:creationId xmlns:a16="http://schemas.microsoft.com/office/drawing/2014/main" id="{01836649-3BFB-BC41-8DB9-D358D1B458BD}"/>
+      </p:pic>
+      <p:cxnSp>
+        <p:nvCxnSpPr>
+          <p:cNvPr id="35" name="Straight Arrow Connector 34">
+            <a:extLst>
+              <a:ext uri="{FF2B5EF4-FFF2-40B4-BE49-F238E27FC236}">
+                <a16:creationId xmlns:a16="http://schemas.microsoft.com/office/drawing/2014/main" id="{543F9DB2-9B7C-7548-33C2-FF418CE3D7A3}"/>
+              </a:ext>
+            </a:extLst>
+          </p:cNvPr>
+          <p:cNvCxnSpPr>
+            <a:cxnSpLocks/>
+          </p:cNvCxnSpPr>
+          <p:nvPr/>
+        </p:nvCxnSpPr>
+        <p:spPr>
+          <a:xfrm>
+            <a:off x="8593509" y="4142568"/>
+            <a:ext cx="274320" cy="0"/>
+          </a:xfrm>
+          <a:prstGeom prst="straightConnector1">
+            <a:avLst/>
+          </a:prstGeom>
+          <a:ln w="57150">
+            <a:solidFill>
+              <a:schemeClr val="tx1"/>
+            </a:solidFill>
+            <a:tailEnd type="triangle"/>
+          </a:ln>
+        </p:spPr>
+        <p:style>
+          <a:lnRef idx="1">
+            <a:schemeClr val="accent1"/>
+          </a:lnRef>
+          <a:fillRef idx="0">
+            <a:schemeClr val="accent1"/>
+          </a:fillRef>
+          <a:effectRef idx="0">
+            <a:schemeClr val="accent1"/>
+          </a:effectRef>
+          <a:fontRef idx="minor">
+            <a:schemeClr val="tx1"/>
+          </a:fontRef>
+        </p:style>
+      </p:cxnSp>
+      <p:sp>
+        <p:nvSpPr>
+          <p:cNvPr id="36" name="Rectangle 35">
+            <a:extLst>
+              <a:ext uri="{FF2B5EF4-FFF2-40B4-BE49-F238E27FC236}">
+                <a16:creationId xmlns:a16="http://schemas.microsoft.com/office/drawing/2014/main" id="{BCFF8C52-8001-D7E2-CFDA-FDEDA2BB52D9}"/>
               </a:ext>
             </a:extLst>
           </p:cNvPr>
@@ -4839,8 +4928,8 @@
         </p:nvSpPr>
         <p:spPr>
           <a:xfrm>
-            <a:off x="0" y="0"/>
-            <a:ext cx="12192000" cy="6858000"/>
+            <a:off x="8884298" y="3212822"/>
+            <a:ext cx="2365960" cy="1879430"/>
           </a:xfrm>
           <a:prstGeom prst="rect">
             <a:avLst/>
@@ -4848,8 +4937,10 @@
           <a:solidFill>
             <a:srgbClr val="808080"/>
           </a:solidFill>
-          <a:ln>
-            <a:noFill/>
+          <a:ln w="28575">
+            <a:solidFill>
+              <a:schemeClr val="tx1"/>
+            </a:solidFill>
           </a:ln>
         </p:spPr>
         <p:style>
@@ -4873,16 +4964,16 @@
           <a:lstStyle/>
           <a:p>
             <a:pPr marL="0" algn="ctr" defTabSz="914400" rtl="0" eaLnBrk="1" latinLnBrk="0" hangingPunct="1"/>
-            <a:endParaRPr lang="en-US" dirty="0"/>
-          </a:p>
-        </p:txBody>
-      </p:sp>
-      <p:sp>
-        <p:nvSpPr>
-          <p:cNvPr id="8" name="Rectangle 7">
-            <a:extLst>
-              <a:ext uri="{FF2B5EF4-FFF2-40B4-BE49-F238E27FC236}">
-                <a16:creationId xmlns:a16="http://schemas.microsoft.com/office/drawing/2014/main" id="{1FF0DAA0-A0FD-6A46-9490-CA00AB61643F}"/>
+            <a:endParaRPr lang="en-US"/>
+          </a:p>
+        </p:txBody>
+      </p:sp>
+      <p:sp>
+        <p:nvSpPr>
+          <p:cNvPr id="38" name="Rectangle 37">
+            <a:extLst>
+              <a:ext uri="{FF2B5EF4-FFF2-40B4-BE49-F238E27FC236}">
+                <a16:creationId xmlns:a16="http://schemas.microsoft.com/office/drawing/2014/main" id="{2A922271-49FC-7B29-0FE4-824062DB6692}"/>
               </a:ext>
             </a:extLst>
           </p:cNvPr>
@@ -4891,8 +4982,8 @@
         </p:nvSpPr>
         <p:spPr>
           <a:xfrm>
-            <a:off x="650009" y="654162"/>
-            <a:ext cx="11146420" cy="2031325"/>
+            <a:off x="9162024" y="3985770"/>
+            <a:ext cx="1848900" cy="323165"/>
           </a:xfrm>
           <a:prstGeom prst="rect">
             <a:avLst/>
@@ -4906,549 +4997,14 @@
           <a:p>
             <a:pPr algn="ctr"/>
             <a:r>
-              <a:rPr lang="en-US" dirty="0">
+              <a:rPr lang="en-US" sz="1500" dirty="0">
                 <a:solidFill>
                   <a:schemeClr val="bg1"/>
                 </a:solidFill>
                 <a:latin typeface="Arial" panose="020B0604020202020204" pitchFamily="34" charset="0"/>
                 <a:cs typeface="Arial" panose="020B0604020202020204" pitchFamily="34" charset="0"/>
               </a:rPr>
-              <a:t>Welcome to the experiment!</a:t>
-            </a:r>
-          </a:p>
-          <a:p>
-            <a:pPr algn="ctr"/>
-            <a:endParaRPr lang="en-US" dirty="0">
-              <a:solidFill>
-                <a:schemeClr val="bg1"/>
-              </a:solidFill>
-              <a:latin typeface="Arial" panose="020B0604020202020204" pitchFamily="34" charset="0"/>
-              <a:cs typeface="Arial" panose="020B0604020202020204" pitchFamily="34" charset="0"/>
-            </a:endParaRPr>
-          </a:p>
-          <a:p>
-            <a:pPr algn="ctr"/>
-            <a:r>
-              <a:rPr lang="en-US" dirty="0">
-                <a:solidFill>
-                  <a:schemeClr val="bg1"/>
-                </a:solidFill>
-                <a:latin typeface="Arial" panose="020B0604020202020204" pitchFamily="34" charset="0"/>
-                <a:cs typeface="Arial" panose="020B0604020202020204" pitchFamily="34" charset="0"/>
-              </a:rPr>
-              <a:t>In this experiment, we will show you pairs of images presented one after the other. </a:t>
-            </a:r>
-          </a:p>
-          <a:p>
-            <a:pPr algn="ctr"/>
-            <a:r>
-              <a:rPr lang="en-US" dirty="0">
-                <a:solidFill>
-                  <a:schemeClr val="bg1"/>
-                </a:solidFill>
-                <a:latin typeface="Arial" panose="020B0604020202020204" pitchFamily="34" charset="0"/>
-                <a:cs typeface="Arial" panose="020B0604020202020204" pitchFamily="34" charset="0"/>
-              </a:rPr>
-              <a:t>Your task is to decide which one is the Correct one. </a:t>
-            </a:r>
-          </a:p>
-          <a:p>
-            <a:pPr algn="ctr"/>
-            <a:endParaRPr lang="en-US" dirty="0">
-              <a:solidFill>
-                <a:schemeClr val="bg1"/>
-              </a:solidFill>
-              <a:latin typeface="Arial" panose="020B0604020202020204" pitchFamily="34" charset="0"/>
-              <a:cs typeface="Arial" panose="020B0604020202020204" pitchFamily="34" charset="0"/>
-            </a:endParaRPr>
-          </a:p>
-          <a:p>
-            <a:pPr algn="ctr"/>
-            <a:r>
-              <a:rPr lang="en-US" dirty="0">
-                <a:solidFill>
-                  <a:schemeClr val="bg1"/>
-                </a:solidFill>
-                <a:latin typeface="Arial" panose="020B0604020202020204" pitchFamily="34" charset="0"/>
-                <a:cs typeface="Arial" panose="020B0604020202020204" pitchFamily="34" charset="0"/>
-              </a:rPr>
-              <a:t>The two images will appear one after the other.</a:t>
-            </a:r>
-          </a:p>
-          <a:p>
-            <a:pPr algn="ctr"/>
-            <a:r>
-              <a:rPr lang="en-US" dirty="0">
-                <a:solidFill>
-                  <a:schemeClr val="bg1"/>
-                </a:solidFill>
-                <a:latin typeface="Arial" panose="020B0604020202020204" pitchFamily="34" charset="0"/>
-                <a:cs typeface="Arial" panose="020B0604020202020204" pitchFamily="34" charset="0"/>
-              </a:rPr>
-              <a:t> When you see a ”+” sign on the screen, you may enter either the “D” or “K” keys to make a decision.</a:t>
-            </a:r>
-          </a:p>
-        </p:txBody>
-      </p:sp>
-      <p:sp>
-        <p:nvSpPr>
-          <p:cNvPr id="28" name="Rectangle 27">
-            <a:extLst>
-              <a:ext uri="{FF2B5EF4-FFF2-40B4-BE49-F238E27FC236}">
-                <a16:creationId xmlns:a16="http://schemas.microsoft.com/office/drawing/2014/main" id="{E4D16A73-0858-319F-16EF-D555589794DF}"/>
-              </a:ext>
-            </a:extLst>
-          </p:cNvPr>
-          <p:cNvSpPr/>
-          <p:nvPr/>
-        </p:nvSpPr>
-        <p:spPr>
-          <a:xfrm>
-            <a:off x="2349141" y="3202437"/>
-            <a:ext cx="2365960" cy="1879430"/>
-          </a:xfrm>
-          <a:prstGeom prst="rect">
-            <a:avLst/>
-          </a:prstGeom>
-          <a:solidFill>
-            <a:srgbClr val="808080"/>
-          </a:solidFill>
-          <a:ln w="28575">
-            <a:solidFill>
-              <a:schemeClr val="tx1"/>
-            </a:solidFill>
-          </a:ln>
-        </p:spPr>
-        <p:style>
-          <a:lnRef idx="2">
-            <a:schemeClr val="accent1">
-              <a:shade val="50000"/>
-            </a:schemeClr>
-          </a:lnRef>
-          <a:fillRef idx="1">
-            <a:schemeClr val="accent1"/>
-          </a:fillRef>
-          <a:effectRef idx="0">
-            <a:schemeClr val="accent1"/>
-          </a:effectRef>
-          <a:fontRef idx="minor">
-            <a:schemeClr val="lt1"/>
-          </a:fontRef>
-        </p:style>
-        <p:txBody>
-          <a:bodyPr rtlCol="0" anchor="ctr"/>
-          <a:lstStyle/>
-          <a:p>
-            <a:pPr marL="0" algn="ctr" defTabSz="914400" rtl="0" eaLnBrk="1" latinLnBrk="0" hangingPunct="1"/>
-            <a:endParaRPr lang="en-US"/>
-          </a:p>
-        </p:txBody>
-      </p:sp>
-      <p:cxnSp>
-        <p:nvCxnSpPr>
-          <p:cNvPr id="29" name="Straight Arrow Connector 28">
-            <a:extLst>
-              <a:ext uri="{FF2B5EF4-FFF2-40B4-BE49-F238E27FC236}">
-                <a16:creationId xmlns:a16="http://schemas.microsoft.com/office/drawing/2014/main" id="{636381C2-DE22-C720-C04D-7F6C724F9C75}"/>
-              </a:ext>
-            </a:extLst>
-          </p:cNvPr>
-          <p:cNvCxnSpPr>
-            <a:cxnSpLocks/>
-          </p:cNvCxnSpPr>
-          <p:nvPr/>
-        </p:nvCxnSpPr>
-        <p:spPr>
-          <a:xfrm>
-            <a:off x="4731570" y="4132183"/>
-            <a:ext cx="274320" cy="0"/>
-          </a:xfrm>
-          <a:prstGeom prst="straightConnector1">
-            <a:avLst/>
-          </a:prstGeom>
-          <a:ln w="57150">
-            <a:solidFill>
-              <a:schemeClr val="tx1"/>
-            </a:solidFill>
-            <a:tailEnd type="triangle"/>
-          </a:ln>
-        </p:spPr>
-        <p:style>
-          <a:lnRef idx="1">
-            <a:schemeClr val="accent1"/>
-          </a:lnRef>
-          <a:fillRef idx="0">
-            <a:schemeClr val="accent1"/>
-          </a:fillRef>
-          <a:effectRef idx="0">
-            <a:schemeClr val="accent1"/>
-          </a:effectRef>
-          <a:fontRef idx="minor">
-            <a:schemeClr val="tx1"/>
-          </a:fontRef>
-        </p:style>
-      </p:cxnSp>
-      <p:sp>
-        <p:nvSpPr>
-          <p:cNvPr id="30" name="Rectangle 29">
-            <a:extLst>
-              <a:ext uri="{FF2B5EF4-FFF2-40B4-BE49-F238E27FC236}">
-                <a16:creationId xmlns:a16="http://schemas.microsoft.com/office/drawing/2014/main" id="{5F7DA9A9-7BB2-1C07-C53F-35537DC78A3F}"/>
-              </a:ext>
-            </a:extLst>
-          </p:cNvPr>
-          <p:cNvSpPr/>
-          <p:nvPr/>
-        </p:nvSpPr>
-        <p:spPr>
-          <a:xfrm>
-            <a:off x="5022359" y="3202437"/>
-            <a:ext cx="2365960" cy="1879430"/>
-          </a:xfrm>
-          <a:prstGeom prst="rect">
-            <a:avLst/>
-          </a:prstGeom>
-          <a:solidFill>
-            <a:srgbClr val="808080"/>
-          </a:solidFill>
-          <a:ln w="28575">
-            <a:solidFill>
-              <a:schemeClr val="tx1"/>
-            </a:solidFill>
-          </a:ln>
-        </p:spPr>
-        <p:style>
-          <a:lnRef idx="2">
-            <a:schemeClr val="accent1">
-              <a:shade val="50000"/>
-            </a:schemeClr>
-          </a:lnRef>
-          <a:fillRef idx="1">
-            <a:schemeClr val="accent1"/>
-          </a:fillRef>
-          <a:effectRef idx="0">
-            <a:schemeClr val="accent1"/>
-          </a:effectRef>
-          <a:fontRef idx="minor">
-            <a:schemeClr val="lt1"/>
-          </a:fontRef>
-        </p:style>
-        <p:txBody>
-          <a:bodyPr rtlCol="0" anchor="ctr"/>
-          <a:lstStyle/>
-          <a:p>
-            <a:pPr marL="0" algn="ctr" defTabSz="914400" rtl="0" eaLnBrk="1" latinLnBrk="0" hangingPunct="1"/>
-            <a:endParaRPr lang="en-US"/>
-          </a:p>
-        </p:txBody>
-      </p:sp>
-      <p:sp>
-        <p:nvSpPr>
-          <p:cNvPr id="31" name="Rectangle 30">
-            <a:extLst>
-              <a:ext uri="{FF2B5EF4-FFF2-40B4-BE49-F238E27FC236}">
-                <a16:creationId xmlns:a16="http://schemas.microsoft.com/office/drawing/2014/main" id="{6F812530-CD65-C465-7DC5-FCF0DF90A0EE}"/>
-              </a:ext>
-            </a:extLst>
-          </p:cNvPr>
-          <p:cNvSpPr/>
-          <p:nvPr/>
-        </p:nvSpPr>
-        <p:spPr>
-          <a:xfrm>
-            <a:off x="3013158" y="3617695"/>
-            <a:ext cx="1097280" cy="1097280"/>
-          </a:xfrm>
-          <a:prstGeom prst="rect">
-            <a:avLst/>
-          </a:prstGeom>
-          <a:solidFill>
-            <a:schemeClr val="bg1"/>
-          </a:solidFill>
-          <a:ln>
-            <a:solidFill>
-              <a:schemeClr val="bg1">
-                <a:lumMod val="85000"/>
-              </a:schemeClr>
-            </a:solidFill>
-          </a:ln>
-        </p:spPr>
-        <p:style>
-          <a:lnRef idx="2">
-            <a:schemeClr val="accent1">
-              <a:shade val="50000"/>
-            </a:schemeClr>
-          </a:lnRef>
-          <a:fillRef idx="1">
-            <a:schemeClr val="accent1"/>
-          </a:fillRef>
-          <a:effectRef idx="0">
-            <a:schemeClr val="accent1"/>
-          </a:effectRef>
-          <a:fontRef idx="minor">
-            <a:schemeClr val="lt1"/>
-          </a:fontRef>
-        </p:style>
-        <p:txBody>
-          <a:bodyPr rtlCol="0" anchor="ctr"/>
-          <a:lstStyle/>
-          <a:p>
-            <a:pPr algn="ctr"/>
-            <a:endParaRPr lang="en-US"/>
-          </a:p>
-        </p:txBody>
-      </p:sp>
-      <p:pic>
-        <p:nvPicPr>
-          <p:cNvPr id="32" name="Picture 31">
-            <a:extLst>
-              <a:ext uri="{FF2B5EF4-FFF2-40B4-BE49-F238E27FC236}">
-                <a16:creationId xmlns:a16="http://schemas.microsoft.com/office/drawing/2014/main" id="{6EE017F3-F63D-C93F-E454-B6A0F9313FDB}"/>
-              </a:ext>
-            </a:extLst>
-          </p:cNvPr>
-          <p:cNvPicPr>
-            <a:picLocks noChangeAspect="1"/>
-          </p:cNvPicPr>
-          <p:nvPr/>
-        </p:nvPicPr>
-        <p:blipFill>
-          <a:blip r:embed="rId3"/>
-          <a:stretch>
-            <a:fillRect/>
-          </a:stretch>
-        </p:blipFill>
-        <p:spPr>
-          <a:xfrm>
-            <a:off x="3104598" y="3706474"/>
-            <a:ext cx="914400" cy="914400"/>
-          </a:xfrm>
-          <a:prstGeom prst="rect">
-            <a:avLst/>
-          </a:prstGeom>
-        </p:spPr>
-      </p:pic>
-      <p:sp>
-        <p:nvSpPr>
-          <p:cNvPr id="33" name="Rectangle 32">
-            <a:extLst>
-              <a:ext uri="{FF2B5EF4-FFF2-40B4-BE49-F238E27FC236}">
-                <a16:creationId xmlns:a16="http://schemas.microsoft.com/office/drawing/2014/main" id="{20ACA483-BA3C-3519-D40C-70BCD9149BE4}"/>
-              </a:ext>
-            </a:extLst>
-          </p:cNvPr>
-          <p:cNvSpPr/>
-          <p:nvPr/>
-        </p:nvSpPr>
-        <p:spPr>
-          <a:xfrm>
-            <a:off x="5674579" y="3601391"/>
-            <a:ext cx="1097280" cy="1097280"/>
-          </a:xfrm>
-          <a:prstGeom prst="rect">
-            <a:avLst/>
-          </a:prstGeom>
-          <a:solidFill>
-            <a:schemeClr val="bg1"/>
-          </a:solidFill>
-          <a:ln>
-            <a:solidFill>
-              <a:schemeClr val="bg1">
-                <a:lumMod val="85000"/>
-              </a:schemeClr>
-            </a:solidFill>
-          </a:ln>
-        </p:spPr>
-        <p:style>
-          <a:lnRef idx="2">
-            <a:schemeClr val="accent1">
-              <a:shade val="50000"/>
-            </a:schemeClr>
-          </a:lnRef>
-          <a:fillRef idx="1">
-            <a:schemeClr val="accent1"/>
-          </a:fillRef>
-          <a:effectRef idx="0">
-            <a:schemeClr val="accent1"/>
-          </a:effectRef>
-          <a:fontRef idx="minor">
-            <a:schemeClr val="lt1"/>
-          </a:fontRef>
-        </p:style>
-        <p:txBody>
-          <a:bodyPr rtlCol="0" anchor="ctr"/>
-          <a:lstStyle/>
-          <a:p>
-            <a:pPr algn="ctr"/>
-            <a:endParaRPr lang="en-US"/>
-          </a:p>
-        </p:txBody>
-      </p:sp>
-      <p:pic>
-        <p:nvPicPr>
-          <p:cNvPr id="34" name="Picture 33">
-            <a:extLst>
-              <a:ext uri="{FF2B5EF4-FFF2-40B4-BE49-F238E27FC236}">
-                <a16:creationId xmlns:a16="http://schemas.microsoft.com/office/drawing/2014/main" id="{EF67E4BC-C004-405E-567C-FE609CFD5630}"/>
-              </a:ext>
-            </a:extLst>
-          </p:cNvPr>
-          <p:cNvPicPr>
-            <a:picLocks noChangeAspect="1"/>
-          </p:cNvPicPr>
-          <p:nvPr/>
-        </p:nvPicPr>
-        <p:blipFill>
-          <a:blip r:embed="rId4"/>
-          <a:stretch>
-            <a:fillRect/>
-          </a:stretch>
-        </p:blipFill>
-        <p:spPr>
-          <a:xfrm>
-            <a:off x="5770389" y="3692831"/>
-            <a:ext cx="914400" cy="914400"/>
-          </a:xfrm>
-          <a:prstGeom prst="rect">
-            <a:avLst/>
-          </a:prstGeom>
-        </p:spPr>
-      </p:pic>
-      <p:cxnSp>
-        <p:nvCxnSpPr>
-          <p:cNvPr id="35" name="Straight Arrow Connector 34">
-            <a:extLst>
-              <a:ext uri="{FF2B5EF4-FFF2-40B4-BE49-F238E27FC236}">
-                <a16:creationId xmlns:a16="http://schemas.microsoft.com/office/drawing/2014/main" id="{543F9DB2-9B7C-7548-33C2-FF418CE3D7A3}"/>
-              </a:ext>
-            </a:extLst>
-          </p:cNvPr>
-          <p:cNvCxnSpPr>
-            <a:cxnSpLocks/>
-          </p:cNvCxnSpPr>
-          <p:nvPr/>
-        </p:nvCxnSpPr>
-        <p:spPr>
-          <a:xfrm>
-            <a:off x="7391725" y="4132183"/>
-            <a:ext cx="274320" cy="0"/>
-          </a:xfrm>
-          <a:prstGeom prst="straightConnector1">
-            <a:avLst/>
-          </a:prstGeom>
-          <a:ln w="57150">
-            <a:solidFill>
-              <a:schemeClr val="tx1"/>
-            </a:solidFill>
-            <a:tailEnd type="triangle"/>
-          </a:ln>
-        </p:spPr>
-        <p:style>
-          <a:lnRef idx="1">
-            <a:schemeClr val="accent1"/>
-          </a:lnRef>
-          <a:fillRef idx="0">
-            <a:schemeClr val="accent1"/>
-          </a:fillRef>
-          <a:effectRef idx="0">
-            <a:schemeClr val="accent1"/>
-          </a:effectRef>
-          <a:fontRef idx="minor">
-            <a:schemeClr val="tx1"/>
-          </a:fontRef>
-        </p:style>
-      </p:cxnSp>
-      <p:sp>
-        <p:nvSpPr>
-          <p:cNvPr id="36" name="Rectangle 35">
-            <a:extLst>
-              <a:ext uri="{FF2B5EF4-FFF2-40B4-BE49-F238E27FC236}">
-                <a16:creationId xmlns:a16="http://schemas.microsoft.com/office/drawing/2014/main" id="{BCFF8C52-8001-D7E2-CFDA-FDEDA2BB52D9}"/>
-              </a:ext>
-            </a:extLst>
-          </p:cNvPr>
-          <p:cNvSpPr/>
-          <p:nvPr/>
-        </p:nvSpPr>
-        <p:spPr>
-          <a:xfrm>
-            <a:off x="7682514" y="3202437"/>
-            <a:ext cx="2365960" cy="1879430"/>
-          </a:xfrm>
-          <a:prstGeom prst="rect">
-            <a:avLst/>
-          </a:prstGeom>
-          <a:solidFill>
-            <a:srgbClr val="808080"/>
-          </a:solidFill>
-          <a:ln w="28575">
-            <a:solidFill>
-              <a:schemeClr val="tx1"/>
-            </a:solidFill>
-          </a:ln>
-        </p:spPr>
-        <p:style>
-          <a:lnRef idx="2">
-            <a:schemeClr val="accent1">
-              <a:shade val="50000"/>
-            </a:schemeClr>
-          </a:lnRef>
-          <a:fillRef idx="1">
-            <a:schemeClr val="accent1"/>
-          </a:fillRef>
-          <a:effectRef idx="0">
-            <a:schemeClr val="accent1"/>
-          </a:effectRef>
-          <a:fontRef idx="minor">
-            <a:schemeClr val="lt1"/>
-          </a:fontRef>
-        </p:style>
-        <p:txBody>
-          <a:bodyPr rtlCol="0" anchor="ctr"/>
-          <a:lstStyle/>
-          <a:p>
-            <a:pPr marL="0" algn="ctr" defTabSz="914400" rtl="0" eaLnBrk="1" latinLnBrk="0" hangingPunct="1"/>
-            <a:endParaRPr lang="en-US"/>
-          </a:p>
-        </p:txBody>
-      </p:sp>
-      <p:sp>
-        <p:nvSpPr>
-          <p:cNvPr id="38" name="Rectangle 37">
-            <a:extLst>
-              <a:ext uri="{FF2B5EF4-FFF2-40B4-BE49-F238E27FC236}">
-                <a16:creationId xmlns:a16="http://schemas.microsoft.com/office/drawing/2014/main" id="{2A922271-49FC-7B29-0FE4-824062DB6692}"/>
-              </a:ext>
-            </a:extLst>
-          </p:cNvPr>
-          <p:cNvSpPr/>
-          <p:nvPr/>
-        </p:nvSpPr>
-        <p:spPr>
-          <a:xfrm>
-            <a:off x="8501483" y="3826681"/>
-            <a:ext cx="728021" cy="630942"/>
-          </a:xfrm>
-          <a:prstGeom prst="rect">
-            <a:avLst/>
-          </a:prstGeom>
-        </p:spPr>
-        <p:txBody>
-          <a:bodyPr wrap="square">
-            <a:spAutoFit/>
-          </a:bodyPr>
-          <a:lstStyle/>
-          <a:p>
-            <a:pPr algn="ctr"/>
-            <a:r>
-              <a:rPr lang="en-US" sz="3500" dirty="0">
-                <a:solidFill>
-                  <a:schemeClr val="bg1"/>
-                </a:solidFill>
-                <a:latin typeface="Arial" panose="020B0604020202020204" pitchFamily="34" charset="0"/>
-                <a:cs typeface="Arial" panose="020B0604020202020204" pitchFamily="34" charset="0"/>
-              </a:rPr>
-              <a:t>+</a:t>
+              <a:t>MAKE A CHOICE</a:t>
             </a:r>
           </a:p>
         </p:txBody>
@@ -5469,7 +5025,7 @@
         </p:nvGrpSpPr>
         <p:grpSpPr>
           <a:xfrm>
-            <a:off x="7921845" y="5209295"/>
+            <a:off x="9123629" y="5219680"/>
             <a:ext cx="1887295" cy="1097280"/>
             <a:chOff x="4543496" y="2244478"/>
             <a:chExt cx="3308070" cy="1923324"/>
@@ -5490,7 +5046,7 @@
             <p:nvPr/>
           </p:nvPicPr>
           <p:blipFill>
-            <a:blip r:embed="rId5"/>
+            <a:blip r:embed="rId4"/>
             <a:stretch>
               <a:fillRect/>
             </a:stretch>
@@ -5520,7 +5076,7 @@
             <p:nvPr/>
           </p:nvPicPr>
           <p:blipFill>
-            <a:blip r:embed="rId6"/>
+            <a:blip r:embed="rId5"/>
             <a:stretch>
               <a:fillRect/>
             </a:stretch>
@@ -5550,7 +5106,7 @@
             <p:nvPr/>
           </p:nvPicPr>
           <p:blipFill>
-            <a:blip r:embed="rId6"/>
+            <a:blip r:embed="rId5"/>
             <a:stretch>
               <a:fillRect/>
             </a:stretch>
@@ -5566,10 +5122,1881 @@
           </p:spPr>
         </p:pic>
       </p:grpSp>
+      <p:sp>
+        <p:nvSpPr>
+          <p:cNvPr id="2" name="Rectangle 1">
+            <a:extLst>
+              <a:ext uri="{FF2B5EF4-FFF2-40B4-BE49-F238E27FC236}">
+                <a16:creationId xmlns:a16="http://schemas.microsoft.com/office/drawing/2014/main" id="{81C163C6-16AD-623D-9AD0-90F27C1C3AA0}"/>
+              </a:ext>
+            </a:extLst>
+          </p:cNvPr>
+          <p:cNvSpPr/>
+          <p:nvPr/>
+        </p:nvSpPr>
+        <p:spPr>
+          <a:xfrm>
+            <a:off x="852957" y="3212822"/>
+            <a:ext cx="2365960" cy="1879430"/>
+          </a:xfrm>
+          <a:prstGeom prst="rect">
+            <a:avLst/>
+          </a:prstGeom>
+          <a:solidFill>
+            <a:srgbClr val="808080"/>
+          </a:solidFill>
+          <a:ln w="28575">
+            <a:solidFill>
+              <a:schemeClr val="tx1"/>
+            </a:solidFill>
+          </a:ln>
+        </p:spPr>
+        <p:style>
+          <a:lnRef idx="2">
+            <a:schemeClr val="accent1">
+              <a:shade val="50000"/>
+            </a:schemeClr>
+          </a:lnRef>
+          <a:fillRef idx="1">
+            <a:schemeClr val="accent1"/>
+          </a:fillRef>
+          <a:effectRef idx="0">
+            <a:schemeClr val="accent1"/>
+          </a:effectRef>
+          <a:fontRef idx="minor">
+            <a:schemeClr val="lt1"/>
+          </a:fontRef>
+        </p:style>
+        <p:txBody>
+          <a:bodyPr rtlCol="0" anchor="ctr"/>
+          <a:lstStyle/>
+          <a:p>
+            <a:pPr marL="0" algn="ctr" defTabSz="914400" rtl="0" eaLnBrk="1" latinLnBrk="0" hangingPunct="1"/>
+            <a:endParaRPr lang="en-US"/>
+          </a:p>
+        </p:txBody>
+      </p:sp>
+      <p:sp>
+        <p:nvSpPr>
+          <p:cNvPr id="3" name="Rectangle 2">
+            <a:extLst>
+              <a:ext uri="{FF2B5EF4-FFF2-40B4-BE49-F238E27FC236}">
+                <a16:creationId xmlns:a16="http://schemas.microsoft.com/office/drawing/2014/main" id="{F9EBD433-8375-ED8D-2AEB-98D1CD0CE2E7}"/>
+              </a:ext>
+            </a:extLst>
+          </p:cNvPr>
+          <p:cNvSpPr/>
+          <p:nvPr/>
+        </p:nvSpPr>
+        <p:spPr>
+          <a:xfrm>
+            <a:off x="4390584" y="3840867"/>
+            <a:ext cx="728021" cy="630942"/>
+          </a:xfrm>
+          <a:prstGeom prst="rect">
+            <a:avLst/>
+          </a:prstGeom>
+        </p:spPr>
+        <p:txBody>
+          <a:bodyPr wrap="square">
+            <a:spAutoFit/>
+          </a:bodyPr>
+          <a:lstStyle/>
+          <a:p>
+            <a:pPr algn="ctr"/>
+            <a:r>
+              <a:rPr lang="en-US" sz="3500" dirty="0">
+                <a:solidFill>
+                  <a:schemeClr val="bg1"/>
+                </a:solidFill>
+                <a:latin typeface="Arial" panose="020B0604020202020204" pitchFamily="34" charset="0"/>
+                <a:cs typeface="Arial" panose="020B0604020202020204" pitchFamily="34" charset="0"/>
+              </a:rPr>
+              <a:t>+</a:t>
+            </a:r>
+          </a:p>
+        </p:txBody>
+      </p:sp>
+      <p:cxnSp>
+        <p:nvCxnSpPr>
+          <p:cNvPr id="5" name="Straight Arrow Connector 4">
+            <a:extLst>
+              <a:ext uri="{FF2B5EF4-FFF2-40B4-BE49-F238E27FC236}">
+                <a16:creationId xmlns:a16="http://schemas.microsoft.com/office/drawing/2014/main" id="{F6B52632-4B53-6C66-956C-984E989AB6B9}"/>
+              </a:ext>
+            </a:extLst>
+          </p:cNvPr>
+          <p:cNvCxnSpPr>
+            <a:cxnSpLocks/>
+          </p:cNvCxnSpPr>
+          <p:nvPr/>
+        </p:nvCxnSpPr>
+        <p:spPr>
+          <a:xfrm>
+            <a:off x="3218917" y="4142568"/>
+            <a:ext cx="274320" cy="0"/>
+          </a:xfrm>
+          <a:prstGeom prst="straightConnector1">
+            <a:avLst/>
+          </a:prstGeom>
+          <a:ln w="57150">
+            <a:solidFill>
+              <a:schemeClr val="tx1"/>
+            </a:solidFill>
+            <a:tailEnd type="triangle"/>
+          </a:ln>
+        </p:spPr>
+        <p:style>
+          <a:lnRef idx="1">
+            <a:schemeClr val="accent1"/>
+          </a:lnRef>
+          <a:fillRef idx="0">
+            <a:schemeClr val="accent1"/>
+          </a:fillRef>
+          <a:effectRef idx="0">
+            <a:schemeClr val="accent1"/>
+          </a:effectRef>
+          <a:fontRef idx="minor">
+            <a:schemeClr val="tx1"/>
+          </a:fontRef>
+        </p:style>
+      </p:cxnSp>
+      <p:sp>
+        <p:nvSpPr>
+          <p:cNvPr id="31" name="Rectangle 30">
+            <a:extLst>
+              <a:ext uri="{FF2B5EF4-FFF2-40B4-BE49-F238E27FC236}">
+                <a16:creationId xmlns:a16="http://schemas.microsoft.com/office/drawing/2014/main" id="{6F812530-CD65-C465-7DC5-FCF0DF90A0EE}"/>
+              </a:ext>
+            </a:extLst>
+          </p:cNvPr>
+          <p:cNvSpPr/>
+          <p:nvPr/>
+        </p:nvSpPr>
+        <p:spPr>
+          <a:xfrm>
+            <a:off x="1498433" y="3614437"/>
+            <a:ext cx="1097280" cy="1097280"/>
+          </a:xfrm>
+          <a:prstGeom prst="rect">
+            <a:avLst/>
+          </a:prstGeom>
+          <a:solidFill>
+            <a:schemeClr val="bg1"/>
+          </a:solidFill>
+          <a:ln>
+            <a:solidFill>
+              <a:schemeClr val="bg1">
+                <a:lumMod val="85000"/>
+              </a:schemeClr>
+            </a:solidFill>
+          </a:ln>
+        </p:spPr>
+        <p:style>
+          <a:lnRef idx="2">
+            <a:schemeClr val="accent1">
+              <a:shade val="50000"/>
+            </a:schemeClr>
+          </a:lnRef>
+          <a:fillRef idx="1">
+            <a:schemeClr val="accent1"/>
+          </a:fillRef>
+          <a:effectRef idx="0">
+            <a:schemeClr val="accent1"/>
+          </a:effectRef>
+          <a:fontRef idx="minor">
+            <a:schemeClr val="lt1"/>
+          </a:fontRef>
+        </p:style>
+        <p:txBody>
+          <a:bodyPr rtlCol="0" anchor="ctr"/>
+          <a:lstStyle/>
+          <a:p>
+            <a:pPr algn="ctr"/>
+            <a:endParaRPr lang="en-US"/>
+          </a:p>
+        </p:txBody>
+      </p:sp>
+      <p:pic>
+        <p:nvPicPr>
+          <p:cNvPr id="32" name="Picture 31">
+            <a:extLst>
+              <a:ext uri="{FF2B5EF4-FFF2-40B4-BE49-F238E27FC236}">
+                <a16:creationId xmlns:a16="http://schemas.microsoft.com/office/drawing/2014/main" id="{6EE017F3-F63D-C93F-E454-B6A0F9313FDB}"/>
+              </a:ext>
+            </a:extLst>
+          </p:cNvPr>
+          <p:cNvPicPr>
+            <a:picLocks noChangeAspect="1"/>
+          </p:cNvPicPr>
+          <p:nvPr/>
+        </p:nvPicPr>
+        <p:blipFill>
+          <a:blip r:embed="rId6"/>
+          <a:stretch>
+            <a:fillRect/>
+          </a:stretch>
+        </p:blipFill>
+        <p:spPr>
+          <a:xfrm>
+            <a:off x="1589873" y="3703216"/>
+            <a:ext cx="914400" cy="914400"/>
+          </a:xfrm>
+          <a:prstGeom prst="rect">
+            <a:avLst/>
+          </a:prstGeom>
+        </p:spPr>
+      </p:pic>
     </p:spTree>
     <p:extLst>
       <p:ext uri="{BB962C8B-B14F-4D97-AF65-F5344CB8AC3E}">
         <p14:creationId xmlns:p14="http://schemas.microsoft.com/office/powerpoint/2010/main" val="1705379598"/>
+      </p:ext>
+    </p:extLst>
+  </p:cSld>
+  <p:clrMapOvr>
+    <a:masterClrMapping/>
+  </p:clrMapOvr>
+</p:sld>
+</file>
+
+<file path=ppt/slides/slide3.xml><?xml version="1.0" encoding="utf-8"?>
+<p:sld xmlns:a="http://schemas.openxmlformats.org/drawingml/2006/main" xmlns:r="http://schemas.openxmlformats.org/officeDocument/2006/relationships" xmlns:p="http://schemas.openxmlformats.org/presentationml/2006/main">
+  <p:cSld>
+    <p:spTree>
+      <p:nvGrpSpPr>
+        <p:cNvPr id="1" name=""/>
+        <p:cNvGrpSpPr/>
+        <p:nvPr/>
+      </p:nvGrpSpPr>
+      <p:grpSpPr>
+        <a:xfrm>
+          <a:off x="0" y="0"/>
+          <a:ext cx="0" cy="0"/>
+          <a:chOff x="0" y="0"/>
+          <a:chExt cx="0" cy="0"/>
+        </a:xfrm>
+      </p:grpSpPr>
+      <p:sp>
+        <p:nvSpPr>
+          <p:cNvPr id="4" name="Rectangle 3">
+            <a:extLst>
+              <a:ext uri="{FF2B5EF4-FFF2-40B4-BE49-F238E27FC236}">
+                <a16:creationId xmlns:a16="http://schemas.microsoft.com/office/drawing/2014/main" id="{01836649-3BFB-BC41-8DB9-D358D1B458BD}"/>
+              </a:ext>
+            </a:extLst>
+          </p:cNvPr>
+          <p:cNvSpPr/>
+          <p:nvPr/>
+        </p:nvSpPr>
+        <p:spPr>
+          <a:xfrm>
+            <a:off x="0" y="0"/>
+            <a:ext cx="12192000" cy="6858000"/>
+          </a:xfrm>
+          <a:prstGeom prst="rect">
+            <a:avLst/>
+          </a:prstGeom>
+          <a:solidFill>
+            <a:srgbClr val="808080"/>
+          </a:solidFill>
+          <a:ln>
+            <a:noFill/>
+          </a:ln>
+        </p:spPr>
+        <p:style>
+          <a:lnRef idx="2">
+            <a:schemeClr val="accent1">
+              <a:shade val="50000"/>
+            </a:schemeClr>
+          </a:lnRef>
+          <a:fillRef idx="1">
+            <a:schemeClr val="accent1"/>
+          </a:fillRef>
+          <a:effectRef idx="0">
+            <a:schemeClr val="accent1"/>
+          </a:effectRef>
+          <a:fontRef idx="minor">
+            <a:schemeClr val="lt1"/>
+          </a:fontRef>
+        </p:style>
+        <p:txBody>
+          <a:bodyPr rtlCol="0" anchor="ctr"/>
+          <a:lstStyle/>
+          <a:p>
+            <a:pPr marL="0" algn="ctr" defTabSz="914400" rtl="0" eaLnBrk="1" latinLnBrk="0" hangingPunct="1"/>
+            <a:endParaRPr lang="en-US" dirty="0"/>
+          </a:p>
+        </p:txBody>
+      </p:sp>
+      <p:sp>
+        <p:nvSpPr>
+          <p:cNvPr id="8" name="Rectangle 7">
+            <a:extLst>
+              <a:ext uri="{FF2B5EF4-FFF2-40B4-BE49-F238E27FC236}">
+                <a16:creationId xmlns:a16="http://schemas.microsoft.com/office/drawing/2014/main" id="{1FF0DAA0-A0FD-6A46-9490-CA00AB61643F}"/>
+              </a:ext>
+            </a:extLst>
+          </p:cNvPr>
+          <p:cNvSpPr/>
+          <p:nvPr/>
+        </p:nvSpPr>
+        <p:spPr>
+          <a:xfrm>
+            <a:off x="650009" y="654162"/>
+            <a:ext cx="11146420" cy="2585323"/>
+          </a:xfrm>
+          <a:prstGeom prst="rect">
+            <a:avLst/>
+          </a:prstGeom>
+        </p:spPr>
+        <p:txBody>
+          <a:bodyPr wrap="square">
+            <a:spAutoFit/>
+          </a:bodyPr>
+          <a:lstStyle/>
+          <a:p>
+            <a:pPr algn="ctr"/>
+            <a:r>
+              <a:rPr lang="en-US" dirty="0">
+                <a:solidFill>
+                  <a:schemeClr val="bg1"/>
+                </a:solidFill>
+                <a:latin typeface="Arial" panose="020B0604020202020204" pitchFamily="34" charset="0"/>
+                <a:cs typeface="Arial" panose="020B0604020202020204" pitchFamily="34" charset="0"/>
+              </a:rPr>
+              <a:t>Welcome to the experiment!</a:t>
+            </a:r>
+          </a:p>
+          <a:p>
+            <a:pPr algn="ctr"/>
+            <a:endParaRPr lang="en-US" dirty="0">
+              <a:solidFill>
+                <a:schemeClr val="bg1"/>
+              </a:solidFill>
+              <a:latin typeface="Arial" panose="020B0604020202020204" pitchFamily="34" charset="0"/>
+              <a:cs typeface="Arial" panose="020B0604020202020204" pitchFamily="34" charset="0"/>
+            </a:endParaRPr>
+          </a:p>
+          <a:p>
+            <a:pPr algn="ctr"/>
+            <a:r>
+              <a:rPr lang="en-US" dirty="0">
+                <a:solidFill>
+                  <a:schemeClr val="bg1"/>
+                </a:solidFill>
+                <a:latin typeface="Arial" panose="020B0604020202020204" pitchFamily="34" charset="0"/>
+                <a:cs typeface="Arial" panose="020B0604020202020204" pitchFamily="34" charset="0"/>
+              </a:rPr>
+              <a:t>In this experiment, we will show you pairs of images presented one after the other. </a:t>
+            </a:r>
+          </a:p>
+          <a:p>
+            <a:pPr algn="ctr"/>
+            <a:r>
+              <a:rPr lang="en-US" dirty="0">
+                <a:solidFill>
+                  <a:schemeClr val="bg1"/>
+                </a:solidFill>
+                <a:latin typeface="Arial" panose="020B0604020202020204" pitchFamily="34" charset="0"/>
+                <a:cs typeface="Arial" panose="020B0604020202020204" pitchFamily="34" charset="0"/>
+              </a:rPr>
+              <a:t>Your task is to decide which one is the Correct one. </a:t>
+            </a:r>
+          </a:p>
+          <a:p>
+            <a:pPr algn="ctr"/>
+            <a:endParaRPr lang="en-US" dirty="0">
+              <a:solidFill>
+                <a:schemeClr val="bg1"/>
+              </a:solidFill>
+              <a:latin typeface="Arial" panose="020B0604020202020204" pitchFamily="34" charset="0"/>
+              <a:cs typeface="Arial" panose="020B0604020202020204" pitchFamily="34" charset="0"/>
+            </a:endParaRPr>
+          </a:p>
+          <a:p>
+            <a:pPr algn="ctr"/>
+            <a:r>
+              <a:rPr lang="en-US" dirty="0">
+                <a:solidFill>
+                  <a:schemeClr val="bg1"/>
+                </a:solidFill>
+                <a:latin typeface="Arial" panose="020B0604020202020204" pitchFamily="34" charset="0"/>
+                <a:cs typeface="Arial" panose="020B0604020202020204" pitchFamily="34" charset="0"/>
+              </a:rPr>
+              <a:t>When the black square appears on the screen, you will have 2 seconds to press the SPACE bar. </a:t>
+            </a:r>
+          </a:p>
+          <a:p>
+            <a:pPr algn="ctr"/>
+            <a:r>
+              <a:rPr lang="en-US" dirty="0">
+                <a:solidFill>
+                  <a:schemeClr val="bg1"/>
+                </a:solidFill>
+                <a:latin typeface="Arial" panose="020B0604020202020204" pitchFamily="34" charset="0"/>
+                <a:cs typeface="Arial" panose="020B0604020202020204" pitchFamily="34" charset="0"/>
+              </a:rPr>
+              <a:t>Then, two images will appear one after the other, with a “+” in between.</a:t>
+            </a:r>
+          </a:p>
+          <a:p>
+            <a:pPr algn="ctr"/>
+            <a:endParaRPr lang="en-US" dirty="0">
+              <a:solidFill>
+                <a:schemeClr val="bg1"/>
+              </a:solidFill>
+              <a:latin typeface="Arial" panose="020B0604020202020204" pitchFamily="34" charset="0"/>
+              <a:cs typeface="Arial" panose="020B0604020202020204" pitchFamily="34" charset="0"/>
+            </a:endParaRPr>
+          </a:p>
+          <a:p>
+            <a:pPr algn="ctr"/>
+            <a:r>
+              <a:rPr lang="en-US" dirty="0">
+                <a:solidFill>
+                  <a:schemeClr val="bg1"/>
+                </a:solidFill>
+                <a:latin typeface="Arial" panose="020B0604020202020204" pitchFamily="34" charset="0"/>
+                <a:cs typeface="Arial" panose="020B0604020202020204" pitchFamily="34" charset="0"/>
+              </a:rPr>
+              <a:t> When you see the prompt “MAKE A CHOICE”, you may enter either the “D” or “K” keys to make a decision.</a:t>
+            </a:r>
+          </a:p>
+        </p:txBody>
+      </p:sp>
+      <p:sp>
+        <p:nvSpPr>
+          <p:cNvPr id="18" name="Rectangle 17">
+            <a:extLst>
+              <a:ext uri="{FF2B5EF4-FFF2-40B4-BE49-F238E27FC236}">
+                <a16:creationId xmlns:a16="http://schemas.microsoft.com/office/drawing/2014/main" id="{D6BC7CDD-2F5E-418F-3623-EDEC485CE32A}"/>
+              </a:ext>
+            </a:extLst>
+          </p:cNvPr>
+          <p:cNvSpPr/>
+          <p:nvPr/>
+        </p:nvSpPr>
+        <p:spPr>
+          <a:xfrm>
+            <a:off x="258150" y="3863972"/>
+            <a:ext cx="2100076" cy="1581874"/>
+          </a:xfrm>
+          <a:prstGeom prst="rect">
+            <a:avLst/>
+          </a:prstGeom>
+          <a:solidFill>
+            <a:srgbClr val="808080"/>
+          </a:solidFill>
+          <a:ln w="28575">
+            <a:solidFill>
+              <a:schemeClr val="tx1"/>
+            </a:solidFill>
+          </a:ln>
+        </p:spPr>
+        <p:style>
+          <a:lnRef idx="2">
+            <a:schemeClr val="accent1">
+              <a:shade val="50000"/>
+            </a:schemeClr>
+          </a:lnRef>
+          <a:fillRef idx="1">
+            <a:schemeClr val="accent1"/>
+          </a:fillRef>
+          <a:effectRef idx="0">
+            <a:schemeClr val="accent1"/>
+          </a:effectRef>
+          <a:fontRef idx="minor">
+            <a:schemeClr val="lt1"/>
+          </a:fontRef>
+        </p:style>
+        <p:txBody>
+          <a:bodyPr rtlCol="0" anchor="ctr"/>
+          <a:lstStyle/>
+          <a:p>
+            <a:pPr marL="0" algn="ctr" defTabSz="914400" rtl="0" eaLnBrk="1" latinLnBrk="0" hangingPunct="1"/>
+            <a:endParaRPr lang="en-US"/>
+          </a:p>
+        </p:txBody>
+      </p:sp>
+      <p:cxnSp>
+        <p:nvCxnSpPr>
+          <p:cNvPr id="19" name="Straight Arrow Connector 18">
+            <a:extLst>
+              <a:ext uri="{FF2B5EF4-FFF2-40B4-BE49-F238E27FC236}">
+                <a16:creationId xmlns:a16="http://schemas.microsoft.com/office/drawing/2014/main" id="{39B820EC-BDAB-F66F-68FF-75353C84C850}"/>
+              </a:ext>
+            </a:extLst>
+          </p:cNvPr>
+          <p:cNvCxnSpPr>
+            <a:cxnSpLocks/>
+          </p:cNvCxnSpPr>
+          <p:nvPr/>
+        </p:nvCxnSpPr>
+        <p:spPr>
+          <a:xfrm>
+            <a:off x="2358226" y="4646518"/>
+            <a:ext cx="243492" cy="0"/>
+          </a:xfrm>
+          <a:prstGeom prst="straightConnector1">
+            <a:avLst/>
+          </a:prstGeom>
+          <a:ln w="57150">
+            <a:solidFill>
+              <a:schemeClr val="tx1"/>
+            </a:solidFill>
+            <a:tailEnd type="triangle"/>
+          </a:ln>
+        </p:spPr>
+        <p:style>
+          <a:lnRef idx="1">
+            <a:schemeClr val="accent1"/>
+          </a:lnRef>
+          <a:fillRef idx="0">
+            <a:schemeClr val="accent1"/>
+          </a:fillRef>
+          <a:effectRef idx="0">
+            <a:schemeClr val="accent1"/>
+          </a:effectRef>
+          <a:fontRef idx="minor">
+            <a:schemeClr val="tx1"/>
+          </a:fontRef>
+        </p:style>
+      </p:cxnSp>
+      <p:sp>
+        <p:nvSpPr>
+          <p:cNvPr id="20" name="Rectangle 19">
+            <a:extLst>
+              <a:ext uri="{FF2B5EF4-FFF2-40B4-BE49-F238E27FC236}">
+                <a16:creationId xmlns:a16="http://schemas.microsoft.com/office/drawing/2014/main" id="{74C2F54D-CF6F-7195-618F-DF3D0BDBF796}"/>
+              </a:ext>
+            </a:extLst>
+          </p:cNvPr>
+          <p:cNvSpPr/>
+          <p:nvPr/>
+        </p:nvSpPr>
+        <p:spPr>
+          <a:xfrm>
+            <a:off x="1007289" y="4361992"/>
+            <a:ext cx="647918" cy="615704"/>
+          </a:xfrm>
+          <a:prstGeom prst="rect">
+            <a:avLst/>
+          </a:prstGeom>
+          <a:solidFill>
+            <a:schemeClr val="tx1"/>
+          </a:solidFill>
+          <a:ln>
+            <a:noFill/>
+          </a:ln>
+        </p:spPr>
+        <p:style>
+          <a:lnRef idx="2">
+            <a:schemeClr val="accent1">
+              <a:shade val="50000"/>
+            </a:schemeClr>
+          </a:lnRef>
+          <a:fillRef idx="1">
+            <a:schemeClr val="accent1"/>
+          </a:fillRef>
+          <a:effectRef idx="0">
+            <a:schemeClr val="accent1"/>
+          </a:effectRef>
+          <a:fontRef idx="minor">
+            <a:schemeClr val="lt1"/>
+          </a:fontRef>
+        </p:style>
+        <p:txBody>
+          <a:bodyPr rtlCol="0" anchor="ctr"/>
+          <a:lstStyle/>
+          <a:p>
+            <a:pPr algn="ctr"/>
+            <a:endParaRPr lang="en-US"/>
+          </a:p>
+        </p:txBody>
+      </p:sp>
+      <p:pic>
+        <p:nvPicPr>
+          <p:cNvPr id="21" name="Picture 20">
+            <a:extLst>
+              <a:ext uri="{FF2B5EF4-FFF2-40B4-BE49-F238E27FC236}">
+                <a16:creationId xmlns:a16="http://schemas.microsoft.com/office/drawing/2014/main" id="{E06DEE3C-D616-AC06-CA7F-47758755C72D}"/>
+              </a:ext>
+            </a:extLst>
+          </p:cNvPr>
+          <p:cNvPicPr>
+            <a:picLocks noChangeAspect="1"/>
+          </p:cNvPicPr>
+          <p:nvPr/>
+        </p:nvPicPr>
+        <p:blipFill>
+          <a:blip r:embed="rId3"/>
+          <a:stretch>
+            <a:fillRect/>
+          </a:stretch>
+        </p:blipFill>
+        <p:spPr>
+          <a:xfrm>
+            <a:off x="473457" y="5475511"/>
+            <a:ext cx="1675203" cy="794247"/>
+          </a:xfrm>
+          <a:prstGeom prst="rect">
+            <a:avLst/>
+          </a:prstGeom>
+        </p:spPr>
+      </p:pic>
+      <p:pic>
+        <p:nvPicPr>
+          <p:cNvPr id="22" name="Picture 21">
+            <a:extLst>
+              <a:ext uri="{FF2B5EF4-FFF2-40B4-BE49-F238E27FC236}">
+                <a16:creationId xmlns:a16="http://schemas.microsoft.com/office/drawing/2014/main" id="{295C4272-B8D9-8823-4951-7C33791DA8A6}"/>
+              </a:ext>
+            </a:extLst>
+          </p:cNvPr>
+          <p:cNvPicPr>
+            <a:picLocks noChangeAspect="1"/>
+          </p:cNvPicPr>
+          <p:nvPr/>
+        </p:nvPicPr>
+        <p:blipFill>
+          <a:blip r:embed="rId4"/>
+          <a:stretch>
+            <a:fillRect/>
+          </a:stretch>
+        </p:blipFill>
+        <p:spPr>
+          <a:xfrm>
+            <a:off x="1111972" y="6110187"/>
+            <a:ext cx="285072" cy="488594"/>
+          </a:xfrm>
+          <a:prstGeom prst="rect">
+            <a:avLst/>
+          </a:prstGeom>
+        </p:spPr>
+      </p:pic>
+      <p:sp>
+        <p:nvSpPr>
+          <p:cNvPr id="23" name="Rectangle 22">
+            <a:extLst>
+              <a:ext uri="{FF2B5EF4-FFF2-40B4-BE49-F238E27FC236}">
+                <a16:creationId xmlns:a16="http://schemas.microsoft.com/office/drawing/2014/main" id="{662AE73E-9D9C-F2ED-978A-06875F0F33EB}"/>
+              </a:ext>
+            </a:extLst>
+          </p:cNvPr>
+          <p:cNvSpPr/>
+          <p:nvPr/>
+        </p:nvSpPr>
+        <p:spPr>
+          <a:xfrm>
+            <a:off x="5099759" y="3855581"/>
+            <a:ext cx="2100076" cy="1581874"/>
+          </a:xfrm>
+          <a:prstGeom prst="rect">
+            <a:avLst/>
+          </a:prstGeom>
+          <a:solidFill>
+            <a:srgbClr val="808080"/>
+          </a:solidFill>
+          <a:ln w="28575">
+            <a:solidFill>
+              <a:schemeClr val="tx1"/>
+            </a:solidFill>
+          </a:ln>
+        </p:spPr>
+        <p:style>
+          <a:lnRef idx="2">
+            <a:schemeClr val="accent1">
+              <a:shade val="50000"/>
+            </a:schemeClr>
+          </a:lnRef>
+          <a:fillRef idx="1">
+            <a:schemeClr val="accent1"/>
+          </a:fillRef>
+          <a:effectRef idx="0">
+            <a:schemeClr val="accent1"/>
+          </a:effectRef>
+          <a:fontRef idx="minor">
+            <a:schemeClr val="lt1"/>
+          </a:fontRef>
+        </p:style>
+        <p:txBody>
+          <a:bodyPr rtlCol="0" anchor="ctr"/>
+          <a:lstStyle/>
+          <a:p>
+            <a:pPr marL="0" algn="ctr" defTabSz="914400" rtl="0" eaLnBrk="1" latinLnBrk="0" hangingPunct="1"/>
+            <a:endParaRPr lang="en-US"/>
+          </a:p>
+        </p:txBody>
+      </p:sp>
+      <p:cxnSp>
+        <p:nvCxnSpPr>
+          <p:cNvPr id="24" name="Straight Arrow Connector 23">
+            <a:extLst>
+              <a:ext uri="{FF2B5EF4-FFF2-40B4-BE49-F238E27FC236}">
+                <a16:creationId xmlns:a16="http://schemas.microsoft.com/office/drawing/2014/main" id="{2BE4F1C0-5A4F-FC60-B1EB-90355FB81532}"/>
+              </a:ext>
+            </a:extLst>
+          </p:cNvPr>
+          <p:cNvCxnSpPr>
+            <a:cxnSpLocks/>
+          </p:cNvCxnSpPr>
+          <p:nvPr/>
+        </p:nvCxnSpPr>
+        <p:spPr>
+          <a:xfrm>
+            <a:off x="7214453" y="4638127"/>
+            <a:ext cx="243492" cy="0"/>
+          </a:xfrm>
+          <a:prstGeom prst="straightConnector1">
+            <a:avLst/>
+          </a:prstGeom>
+          <a:ln w="57150">
+            <a:solidFill>
+              <a:schemeClr val="tx1"/>
+            </a:solidFill>
+            <a:tailEnd type="triangle"/>
+          </a:ln>
+        </p:spPr>
+        <p:style>
+          <a:lnRef idx="1">
+            <a:schemeClr val="accent1"/>
+          </a:lnRef>
+          <a:fillRef idx="0">
+            <a:schemeClr val="accent1"/>
+          </a:fillRef>
+          <a:effectRef idx="0">
+            <a:schemeClr val="accent1"/>
+          </a:effectRef>
+          <a:fontRef idx="minor">
+            <a:schemeClr val="tx1"/>
+          </a:fontRef>
+        </p:style>
+      </p:cxnSp>
+      <p:sp>
+        <p:nvSpPr>
+          <p:cNvPr id="25" name="Rectangle 24">
+            <a:extLst>
+              <a:ext uri="{FF2B5EF4-FFF2-40B4-BE49-F238E27FC236}">
+                <a16:creationId xmlns:a16="http://schemas.microsoft.com/office/drawing/2014/main" id="{A98FBF6F-E976-2D9E-C48D-3A95780DBCAA}"/>
+              </a:ext>
+            </a:extLst>
+          </p:cNvPr>
+          <p:cNvSpPr/>
+          <p:nvPr/>
+        </p:nvSpPr>
+        <p:spPr>
+          <a:xfrm>
+            <a:off x="7472564" y="3855581"/>
+            <a:ext cx="2100076" cy="1581874"/>
+          </a:xfrm>
+          <a:prstGeom prst="rect">
+            <a:avLst/>
+          </a:prstGeom>
+          <a:solidFill>
+            <a:srgbClr val="808080"/>
+          </a:solidFill>
+          <a:ln w="28575">
+            <a:solidFill>
+              <a:schemeClr val="tx1"/>
+            </a:solidFill>
+          </a:ln>
+        </p:spPr>
+        <p:style>
+          <a:lnRef idx="2">
+            <a:schemeClr val="accent1">
+              <a:shade val="50000"/>
+            </a:schemeClr>
+          </a:lnRef>
+          <a:fillRef idx="1">
+            <a:schemeClr val="accent1"/>
+          </a:fillRef>
+          <a:effectRef idx="0">
+            <a:schemeClr val="accent1"/>
+          </a:effectRef>
+          <a:fontRef idx="minor">
+            <a:schemeClr val="lt1"/>
+          </a:fontRef>
+        </p:style>
+        <p:txBody>
+          <a:bodyPr rtlCol="0" anchor="ctr"/>
+          <a:lstStyle/>
+          <a:p>
+            <a:pPr marL="0" algn="ctr" defTabSz="914400" rtl="0" eaLnBrk="1" latinLnBrk="0" hangingPunct="1"/>
+            <a:endParaRPr lang="en-US"/>
+          </a:p>
+        </p:txBody>
+      </p:sp>
+      <p:sp>
+        <p:nvSpPr>
+          <p:cNvPr id="26" name="Rectangle 25">
+            <a:extLst>
+              <a:ext uri="{FF2B5EF4-FFF2-40B4-BE49-F238E27FC236}">
+                <a16:creationId xmlns:a16="http://schemas.microsoft.com/office/drawing/2014/main" id="{142C9CBE-7A91-C3FB-9282-18CD2E12A34A}"/>
+              </a:ext>
+            </a:extLst>
+          </p:cNvPr>
+          <p:cNvSpPr/>
+          <p:nvPr/>
+        </p:nvSpPr>
+        <p:spPr>
+          <a:xfrm>
+            <a:off x="8051488" y="4191372"/>
+            <a:ext cx="973969" cy="923556"/>
+          </a:xfrm>
+          <a:prstGeom prst="rect">
+            <a:avLst/>
+          </a:prstGeom>
+          <a:solidFill>
+            <a:schemeClr val="bg1"/>
+          </a:solidFill>
+          <a:ln>
+            <a:solidFill>
+              <a:schemeClr val="bg1">
+                <a:lumMod val="85000"/>
+              </a:schemeClr>
+            </a:solidFill>
+          </a:ln>
+        </p:spPr>
+        <p:style>
+          <a:lnRef idx="2">
+            <a:schemeClr val="accent1">
+              <a:shade val="50000"/>
+            </a:schemeClr>
+          </a:lnRef>
+          <a:fillRef idx="1">
+            <a:schemeClr val="accent1"/>
+          </a:fillRef>
+          <a:effectRef idx="0">
+            <a:schemeClr val="accent1"/>
+          </a:effectRef>
+          <a:fontRef idx="minor">
+            <a:schemeClr val="lt1"/>
+          </a:fontRef>
+        </p:style>
+        <p:txBody>
+          <a:bodyPr rtlCol="0" anchor="ctr"/>
+          <a:lstStyle/>
+          <a:p>
+            <a:pPr algn="ctr"/>
+            <a:endParaRPr lang="en-US"/>
+          </a:p>
+        </p:txBody>
+      </p:sp>
+      <p:pic>
+        <p:nvPicPr>
+          <p:cNvPr id="27" name="Picture 26">
+            <a:extLst>
+              <a:ext uri="{FF2B5EF4-FFF2-40B4-BE49-F238E27FC236}">
+                <a16:creationId xmlns:a16="http://schemas.microsoft.com/office/drawing/2014/main" id="{BD10C554-5602-2E22-C812-0FAB5B7E6FED}"/>
+              </a:ext>
+            </a:extLst>
+          </p:cNvPr>
+          <p:cNvPicPr>
+            <a:picLocks noChangeAspect="1"/>
+          </p:cNvPicPr>
+          <p:nvPr/>
+        </p:nvPicPr>
+        <p:blipFill>
+          <a:blip r:embed="rId5"/>
+          <a:stretch>
+            <a:fillRect/>
+          </a:stretch>
+        </p:blipFill>
+        <p:spPr>
+          <a:xfrm>
+            <a:off x="8136531" y="4268335"/>
+            <a:ext cx="811641" cy="769630"/>
+          </a:xfrm>
+          <a:prstGeom prst="rect">
+            <a:avLst/>
+          </a:prstGeom>
+        </p:spPr>
+      </p:pic>
+      <p:cxnSp>
+        <p:nvCxnSpPr>
+          <p:cNvPr id="37" name="Straight Arrow Connector 36">
+            <a:extLst>
+              <a:ext uri="{FF2B5EF4-FFF2-40B4-BE49-F238E27FC236}">
+                <a16:creationId xmlns:a16="http://schemas.microsoft.com/office/drawing/2014/main" id="{F6E180E5-645F-D0B3-8412-B76A0DA911C5}"/>
+              </a:ext>
+            </a:extLst>
+          </p:cNvPr>
+          <p:cNvCxnSpPr>
+            <a:cxnSpLocks/>
+          </p:cNvCxnSpPr>
+          <p:nvPr/>
+        </p:nvCxnSpPr>
+        <p:spPr>
+          <a:xfrm>
+            <a:off x="9575663" y="4638127"/>
+            <a:ext cx="243492" cy="0"/>
+          </a:xfrm>
+          <a:prstGeom prst="straightConnector1">
+            <a:avLst/>
+          </a:prstGeom>
+          <a:ln w="57150">
+            <a:solidFill>
+              <a:schemeClr val="tx1"/>
+            </a:solidFill>
+            <a:tailEnd type="triangle"/>
+          </a:ln>
+        </p:spPr>
+        <p:style>
+          <a:lnRef idx="1">
+            <a:schemeClr val="accent1"/>
+          </a:lnRef>
+          <a:fillRef idx="0">
+            <a:schemeClr val="accent1"/>
+          </a:fillRef>
+          <a:effectRef idx="0">
+            <a:schemeClr val="accent1"/>
+          </a:effectRef>
+          <a:fontRef idx="minor">
+            <a:schemeClr val="tx1"/>
+          </a:fontRef>
+        </p:style>
+      </p:cxnSp>
+      <p:sp>
+        <p:nvSpPr>
+          <p:cNvPr id="43" name="Rectangle 42">
+            <a:extLst>
+              <a:ext uri="{FF2B5EF4-FFF2-40B4-BE49-F238E27FC236}">
+                <a16:creationId xmlns:a16="http://schemas.microsoft.com/office/drawing/2014/main" id="{7612208A-E068-2CE4-2061-001E78C4219B}"/>
+              </a:ext>
+            </a:extLst>
+          </p:cNvPr>
+          <p:cNvSpPr/>
+          <p:nvPr/>
+        </p:nvSpPr>
+        <p:spPr>
+          <a:xfrm>
+            <a:off x="9833774" y="3855581"/>
+            <a:ext cx="2100076" cy="1581874"/>
+          </a:xfrm>
+          <a:prstGeom prst="rect">
+            <a:avLst/>
+          </a:prstGeom>
+          <a:solidFill>
+            <a:srgbClr val="808080"/>
+          </a:solidFill>
+          <a:ln w="28575">
+            <a:solidFill>
+              <a:schemeClr val="tx1"/>
+            </a:solidFill>
+          </a:ln>
+        </p:spPr>
+        <p:style>
+          <a:lnRef idx="2">
+            <a:schemeClr val="accent1">
+              <a:shade val="50000"/>
+            </a:schemeClr>
+          </a:lnRef>
+          <a:fillRef idx="1">
+            <a:schemeClr val="accent1"/>
+          </a:fillRef>
+          <a:effectRef idx="0">
+            <a:schemeClr val="accent1"/>
+          </a:effectRef>
+          <a:fontRef idx="minor">
+            <a:schemeClr val="lt1"/>
+          </a:fontRef>
+        </p:style>
+        <p:txBody>
+          <a:bodyPr rtlCol="0" anchor="ctr"/>
+          <a:lstStyle/>
+          <a:p>
+            <a:pPr marL="0" algn="ctr" defTabSz="914400" rtl="0" eaLnBrk="1" latinLnBrk="0" hangingPunct="1"/>
+            <a:endParaRPr lang="en-US"/>
+          </a:p>
+        </p:txBody>
+      </p:sp>
+      <p:sp>
+        <p:nvSpPr>
+          <p:cNvPr id="44" name="Rectangle 43">
+            <a:extLst>
+              <a:ext uri="{FF2B5EF4-FFF2-40B4-BE49-F238E27FC236}">
+                <a16:creationId xmlns:a16="http://schemas.microsoft.com/office/drawing/2014/main" id="{3EE0B3B4-1A01-8E49-7941-DC9095B5FB83}"/>
+              </a:ext>
+            </a:extLst>
+          </p:cNvPr>
+          <p:cNvSpPr/>
+          <p:nvPr/>
+        </p:nvSpPr>
+        <p:spPr>
+          <a:xfrm>
+            <a:off x="10080289" y="4506154"/>
+            <a:ext cx="1641123" cy="276999"/>
+          </a:xfrm>
+          <a:prstGeom prst="rect">
+            <a:avLst/>
+          </a:prstGeom>
+        </p:spPr>
+        <p:txBody>
+          <a:bodyPr wrap="square">
+            <a:spAutoFit/>
+          </a:bodyPr>
+          <a:lstStyle/>
+          <a:p>
+            <a:pPr algn="ctr"/>
+            <a:r>
+              <a:rPr lang="en-US" sz="1200" dirty="0">
+                <a:solidFill>
+                  <a:schemeClr val="bg1"/>
+                </a:solidFill>
+                <a:latin typeface="Arial" panose="020B0604020202020204" pitchFamily="34" charset="0"/>
+                <a:cs typeface="Arial" panose="020B0604020202020204" pitchFamily="34" charset="0"/>
+              </a:rPr>
+              <a:t>MAKE A CHOICE</a:t>
+            </a:r>
+          </a:p>
+        </p:txBody>
+      </p:sp>
+      <p:grpSp>
+        <p:nvGrpSpPr>
+          <p:cNvPr id="45" name="Group 44">
+            <a:extLst>
+              <a:ext uri="{FF2B5EF4-FFF2-40B4-BE49-F238E27FC236}">
+                <a16:creationId xmlns:a16="http://schemas.microsoft.com/office/drawing/2014/main" id="{89D72E98-659A-8D10-7F13-9F6061C4745E}"/>
+              </a:ext>
+            </a:extLst>
+          </p:cNvPr>
+          <p:cNvGrpSpPr>
+            <a:grpSpLocks noChangeAspect="1"/>
+          </p:cNvGrpSpPr>
+          <p:nvPr/>
+        </p:nvGrpSpPr>
+        <p:grpSpPr>
+          <a:xfrm>
+            <a:off x="10046209" y="5453268"/>
+            <a:ext cx="1675203" cy="923556"/>
+            <a:chOff x="4543496" y="2244478"/>
+            <a:chExt cx="3308070" cy="1923324"/>
+          </a:xfrm>
+        </p:grpSpPr>
+        <p:pic>
+          <p:nvPicPr>
+            <p:cNvPr id="46" name="Picture 45">
+              <a:extLst>
+                <a:ext uri="{FF2B5EF4-FFF2-40B4-BE49-F238E27FC236}">
+                  <a16:creationId xmlns:a16="http://schemas.microsoft.com/office/drawing/2014/main" id="{CD8B53A8-C6E1-4915-867F-B365E38DD1C7}"/>
+                </a:ext>
+              </a:extLst>
+            </p:cNvPr>
+            <p:cNvPicPr>
+              <a:picLocks noChangeAspect="1"/>
+            </p:cNvPicPr>
+            <p:nvPr/>
+          </p:nvPicPr>
+          <p:blipFill>
+            <a:blip r:embed="rId3"/>
+            <a:stretch>
+              <a:fillRect/>
+            </a:stretch>
+          </p:blipFill>
+          <p:spPr>
+            <a:xfrm>
+              <a:off x="4543496" y="2244478"/>
+              <a:ext cx="3308070" cy="1654035"/>
+            </a:xfrm>
+            <a:prstGeom prst="rect">
+              <a:avLst/>
+            </a:prstGeom>
+          </p:spPr>
+        </p:pic>
+        <p:pic>
+          <p:nvPicPr>
+            <p:cNvPr id="47" name="Picture 46">
+              <a:extLst>
+                <a:ext uri="{FF2B5EF4-FFF2-40B4-BE49-F238E27FC236}">
+                  <a16:creationId xmlns:a16="http://schemas.microsoft.com/office/drawing/2014/main" id="{81B0D633-AA76-3C93-5E66-B1514B586831}"/>
+                </a:ext>
+              </a:extLst>
+            </p:cNvPr>
+            <p:cNvPicPr>
+              <a:picLocks noChangeAspect="1"/>
+            </p:cNvPicPr>
+            <p:nvPr/>
+          </p:nvPicPr>
+          <p:blipFill>
+            <a:blip r:embed="rId4"/>
+            <a:stretch>
+              <a:fillRect/>
+            </a:stretch>
+          </p:blipFill>
+          <p:spPr>
+            <a:xfrm>
+              <a:off x="6229508" y="3126098"/>
+              <a:ext cx="562940" cy="1017506"/>
+            </a:xfrm>
+            <a:prstGeom prst="rect">
+              <a:avLst/>
+            </a:prstGeom>
+          </p:spPr>
+        </p:pic>
+        <p:pic>
+          <p:nvPicPr>
+            <p:cNvPr id="48" name="Picture 47">
+              <a:extLst>
+                <a:ext uri="{FF2B5EF4-FFF2-40B4-BE49-F238E27FC236}">
+                  <a16:creationId xmlns:a16="http://schemas.microsoft.com/office/drawing/2014/main" id="{FCE68632-9979-D462-A8E4-525CEAECA7BC}"/>
+                </a:ext>
+              </a:extLst>
+            </p:cNvPr>
+            <p:cNvPicPr>
+              <a:picLocks noChangeAspect="1"/>
+            </p:cNvPicPr>
+            <p:nvPr/>
+          </p:nvPicPr>
+          <p:blipFill>
+            <a:blip r:embed="rId4"/>
+            <a:stretch>
+              <a:fillRect/>
+            </a:stretch>
+          </p:blipFill>
+          <p:spPr>
+            <a:xfrm flipH="1">
+              <a:off x="5144014" y="3148085"/>
+              <a:ext cx="564163" cy="1019717"/>
+            </a:xfrm>
+            <a:prstGeom prst="rect">
+              <a:avLst/>
+            </a:prstGeom>
+          </p:spPr>
+        </p:pic>
+      </p:grpSp>
+      <p:sp>
+        <p:nvSpPr>
+          <p:cNvPr id="49" name="Rectangle 48">
+            <a:extLst>
+              <a:ext uri="{FF2B5EF4-FFF2-40B4-BE49-F238E27FC236}">
+                <a16:creationId xmlns:a16="http://schemas.microsoft.com/office/drawing/2014/main" id="{DAD5961E-C76D-17EF-6693-887A940546B4}"/>
+              </a:ext>
+            </a:extLst>
+          </p:cNvPr>
+          <p:cNvSpPr/>
+          <p:nvPr/>
+        </p:nvSpPr>
+        <p:spPr>
+          <a:xfrm>
+            <a:off x="2704985" y="3855581"/>
+            <a:ext cx="2100076" cy="1581874"/>
+          </a:xfrm>
+          <a:prstGeom prst="rect">
+            <a:avLst/>
+          </a:prstGeom>
+          <a:solidFill>
+            <a:srgbClr val="808080"/>
+          </a:solidFill>
+          <a:ln w="28575">
+            <a:solidFill>
+              <a:schemeClr val="tx1"/>
+            </a:solidFill>
+          </a:ln>
+        </p:spPr>
+        <p:style>
+          <a:lnRef idx="2">
+            <a:schemeClr val="accent1">
+              <a:shade val="50000"/>
+            </a:schemeClr>
+          </a:lnRef>
+          <a:fillRef idx="1">
+            <a:schemeClr val="accent1"/>
+          </a:fillRef>
+          <a:effectRef idx="0">
+            <a:schemeClr val="accent1"/>
+          </a:effectRef>
+          <a:fontRef idx="minor">
+            <a:schemeClr val="lt1"/>
+          </a:fontRef>
+        </p:style>
+        <p:txBody>
+          <a:bodyPr rtlCol="0" anchor="ctr"/>
+          <a:lstStyle/>
+          <a:p>
+            <a:pPr marL="0" algn="ctr" defTabSz="914400" rtl="0" eaLnBrk="1" latinLnBrk="0" hangingPunct="1"/>
+            <a:endParaRPr lang="en-US"/>
+          </a:p>
+        </p:txBody>
+      </p:sp>
+      <p:sp>
+        <p:nvSpPr>
+          <p:cNvPr id="50" name="Rectangle 49">
+            <a:extLst>
+              <a:ext uri="{FF2B5EF4-FFF2-40B4-BE49-F238E27FC236}">
+                <a16:creationId xmlns:a16="http://schemas.microsoft.com/office/drawing/2014/main" id="{6E14D98C-5B87-D00D-95DA-444DC9C776DB}"/>
+              </a:ext>
+            </a:extLst>
+          </p:cNvPr>
+          <p:cNvSpPr/>
+          <p:nvPr/>
+        </p:nvSpPr>
+        <p:spPr>
+          <a:xfrm>
+            <a:off x="5845058" y="4384192"/>
+            <a:ext cx="646207" cy="531050"/>
+          </a:xfrm>
+          <a:prstGeom prst="rect">
+            <a:avLst/>
+          </a:prstGeom>
+        </p:spPr>
+        <p:txBody>
+          <a:bodyPr wrap="square">
+            <a:spAutoFit/>
+          </a:bodyPr>
+          <a:lstStyle/>
+          <a:p>
+            <a:pPr algn="ctr"/>
+            <a:r>
+              <a:rPr lang="en-US" sz="3500" dirty="0">
+                <a:solidFill>
+                  <a:schemeClr val="bg1"/>
+                </a:solidFill>
+                <a:latin typeface="Arial" panose="020B0604020202020204" pitchFamily="34" charset="0"/>
+                <a:cs typeface="Arial" panose="020B0604020202020204" pitchFamily="34" charset="0"/>
+              </a:rPr>
+              <a:t>+</a:t>
+            </a:r>
+          </a:p>
+        </p:txBody>
+      </p:sp>
+      <p:cxnSp>
+        <p:nvCxnSpPr>
+          <p:cNvPr id="51" name="Straight Arrow Connector 50">
+            <a:extLst>
+              <a:ext uri="{FF2B5EF4-FFF2-40B4-BE49-F238E27FC236}">
+                <a16:creationId xmlns:a16="http://schemas.microsoft.com/office/drawing/2014/main" id="{B4B277D4-1E26-A713-CF05-32C8AF49C63E}"/>
+              </a:ext>
+            </a:extLst>
+          </p:cNvPr>
+          <p:cNvCxnSpPr>
+            <a:cxnSpLocks/>
+          </p:cNvCxnSpPr>
+          <p:nvPr/>
+        </p:nvCxnSpPr>
+        <p:spPr>
+          <a:xfrm>
+            <a:off x="4805061" y="4638127"/>
+            <a:ext cx="243492" cy="0"/>
+          </a:xfrm>
+          <a:prstGeom prst="straightConnector1">
+            <a:avLst/>
+          </a:prstGeom>
+          <a:ln w="57150">
+            <a:solidFill>
+              <a:schemeClr val="tx1"/>
+            </a:solidFill>
+            <a:tailEnd type="triangle"/>
+          </a:ln>
+        </p:spPr>
+        <p:style>
+          <a:lnRef idx="1">
+            <a:schemeClr val="accent1"/>
+          </a:lnRef>
+          <a:fillRef idx="0">
+            <a:schemeClr val="accent1"/>
+          </a:fillRef>
+          <a:effectRef idx="0">
+            <a:schemeClr val="accent1"/>
+          </a:effectRef>
+          <a:fontRef idx="minor">
+            <a:schemeClr val="tx1"/>
+          </a:fontRef>
+        </p:style>
+      </p:cxnSp>
+      <p:sp>
+        <p:nvSpPr>
+          <p:cNvPr id="52" name="Rectangle 51">
+            <a:extLst>
+              <a:ext uri="{FF2B5EF4-FFF2-40B4-BE49-F238E27FC236}">
+                <a16:creationId xmlns:a16="http://schemas.microsoft.com/office/drawing/2014/main" id="{310C6EE5-5718-3C3F-03DC-83110F07FE7F}"/>
+              </a:ext>
+            </a:extLst>
+          </p:cNvPr>
+          <p:cNvSpPr/>
+          <p:nvPr/>
+        </p:nvSpPr>
+        <p:spPr>
+          <a:xfrm>
+            <a:off x="3277923" y="4193611"/>
+            <a:ext cx="973969" cy="923556"/>
+          </a:xfrm>
+          <a:prstGeom prst="rect">
+            <a:avLst/>
+          </a:prstGeom>
+          <a:solidFill>
+            <a:schemeClr val="bg1"/>
+          </a:solidFill>
+          <a:ln>
+            <a:solidFill>
+              <a:schemeClr val="bg1">
+                <a:lumMod val="85000"/>
+              </a:schemeClr>
+            </a:solidFill>
+          </a:ln>
+        </p:spPr>
+        <p:style>
+          <a:lnRef idx="2">
+            <a:schemeClr val="accent1">
+              <a:shade val="50000"/>
+            </a:schemeClr>
+          </a:lnRef>
+          <a:fillRef idx="1">
+            <a:schemeClr val="accent1"/>
+          </a:fillRef>
+          <a:effectRef idx="0">
+            <a:schemeClr val="accent1"/>
+          </a:effectRef>
+          <a:fontRef idx="minor">
+            <a:schemeClr val="lt1"/>
+          </a:fontRef>
+        </p:style>
+        <p:txBody>
+          <a:bodyPr rtlCol="0" anchor="ctr"/>
+          <a:lstStyle/>
+          <a:p>
+            <a:pPr algn="ctr"/>
+            <a:endParaRPr lang="en-US"/>
+          </a:p>
+        </p:txBody>
+      </p:sp>
+      <p:pic>
+        <p:nvPicPr>
+          <p:cNvPr id="53" name="Picture 52">
+            <a:extLst>
+              <a:ext uri="{FF2B5EF4-FFF2-40B4-BE49-F238E27FC236}">
+                <a16:creationId xmlns:a16="http://schemas.microsoft.com/office/drawing/2014/main" id="{B6349D55-BA9A-2310-8CD9-96F2B107CB25}"/>
+              </a:ext>
+            </a:extLst>
+          </p:cNvPr>
+          <p:cNvPicPr>
+            <a:picLocks noChangeAspect="1"/>
+          </p:cNvPicPr>
+          <p:nvPr/>
+        </p:nvPicPr>
+        <p:blipFill>
+          <a:blip r:embed="rId6"/>
+          <a:stretch>
+            <a:fillRect/>
+          </a:stretch>
+        </p:blipFill>
+        <p:spPr>
+          <a:xfrm>
+            <a:off x="3359087" y="4268335"/>
+            <a:ext cx="811641" cy="769630"/>
+          </a:xfrm>
+          <a:prstGeom prst="rect">
+            <a:avLst/>
+          </a:prstGeom>
+        </p:spPr>
+      </p:pic>
+    </p:spTree>
+    <p:extLst>
+      <p:ext uri="{BB962C8B-B14F-4D97-AF65-F5344CB8AC3E}">
+        <p14:creationId xmlns:p14="http://schemas.microsoft.com/office/powerpoint/2010/main" val="3463080705"/>
+      </p:ext>
+    </p:extLst>
+  </p:cSld>
+  <p:clrMapOvr>
+    <a:masterClrMapping/>
+  </p:clrMapOvr>
+</p:sld>
+</file>
+
+<file path=ppt/slides/slide4.xml><?xml version="1.0" encoding="utf-8"?>
+<p:sld xmlns:a="http://schemas.openxmlformats.org/drawingml/2006/main" xmlns:r="http://schemas.openxmlformats.org/officeDocument/2006/relationships" xmlns:p="http://schemas.openxmlformats.org/presentationml/2006/main">
+  <p:cSld>
+    <p:spTree>
+      <p:nvGrpSpPr>
+        <p:cNvPr id="1" name=""/>
+        <p:cNvGrpSpPr/>
+        <p:nvPr/>
+      </p:nvGrpSpPr>
+      <p:grpSpPr>
+        <a:xfrm>
+          <a:off x="0" y="0"/>
+          <a:ext cx="0" cy="0"/>
+          <a:chOff x="0" y="0"/>
+          <a:chExt cx="0" cy="0"/>
+        </a:xfrm>
+      </p:grpSpPr>
+      <p:sp>
+        <p:nvSpPr>
+          <p:cNvPr id="4" name="Rectangle 3">
+            <a:extLst>
+              <a:ext uri="{FF2B5EF4-FFF2-40B4-BE49-F238E27FC236}">
+                <a16:creationId xmlns:a16="http://schemas.microsoft.com/office/drawing/2014/main" id="{01836649-3BFB-BC41-8DB9-D358D1B458BD}"/>
+              </a:ext>
+            </a:extLst>
+          </p:cNvPr>
+          <p:cNvSpPr/>
+          <p:nvPr/>
+        </p:nvSpPr>
+        <p:spPr>
+          <a:xfrm>
+            <a:off x="0" y="0"/>
+            <a:ext cx="12192000" cy="6858000"/>
+          </a:xfrm>
+          <a:prstGeom prst="rect">
+            <a:avLst/>
+          </a:prstGeom>
+          <a:solidFill>
+            <a:srgbClr val="808080"/>
+          </a:solidFill>
+          <a:ln>
+            <a:noFill/>
+          </a:ln>
+        </p:spPr>
+        <p:style>
+          <a:lnRef idx="2">
+            <a:schemeClr val="accent1">
+              <a:shade val="50000"/>
+            </a:schemeClr>
+          </a:lnRef>
+          <a:fillRef idx="1">
+            <a:schemeClr val="accent1"/>
+          </a:fillRef>
+          <a:effectRef idx="0">
+            <a:schemeClr val="accent1"/>
+          </a:effectRef>
+          <a:fontRef idx="minor">
+            <a:schemeClr val="lt1"/>
+          </a:fontRef>
+        </p:style>
+        <p:txBody>
+          <a:bodyPr rtlCol="0" anchor="ctr"/>
+          <a:lstStyle/>
+          <a:p>
+            <a:pPr marL="0" algn="ctr" defTabSz="914400" rtl="0" eaLnBrk="1" latinLnBrk="0" hangingPunct="1"/>
+            <a:endParaRPr lang="en-US" dirty="0"/>
+          </a:p>
+        </p:txBody>
+      </p:sp>
+      <p:sp>
+        <p:nvSpPr>
+          <p:cNvPr id="8" name="Rectangle 7">
+            <a:extLst>
+              <a:ext uri="{FF2B5EF4-FFF2-40B4-BE49-F238E27FC236}">
+                <a16:creationId xmlns:a16="http://schemas.microsoft.com/office/drawing/2014/main" id="{1FF0DAA0-A0FD-6A46-9490-CA00AB61643F}"/>
+              </a:ext>
+            </a:extLst>
+          </p:cNvPr>
+          <p:cNvSpPr/>
+          <p:nvPr/>
+        </p:nvSpPr>
+        <p:spPr>
+          <a:xfrm>
+            <a:off x="716198" y="717214"/>
+            <a:ext cx="10308853" cy="646331"/>
+          </a:xfrm>
+          <a:prstGeom prst="rect">
+            <a:avLst/>
+          </a:prstGeom>
+        </p:spPr>
+        <p:txBody>
+          <a:bodyPr wrap="square">
+            <a:spAutoFit/>
+          </a:bodyPr>
+          <a:lstStyle/>
+          <a:p>
+            <a:pPr algn="ctr"/>
+            <a:r>
+              <a:rPr lang="en-US" dirty="0">
+                <a:solidFill>
+                  <a:schemeClr val="bg1"/>
+                </a:solidFill>
+                <a:latin typeface="Arial" panose="020B0604020202020204" pitchFamily="34" charset="0"/>
+                <a:cs typeface="Arial" panose="020B0604020202020204" pitchFamily="34" charset="0"/>
+              </a:rPr>
+              <a:t>If you are correct you will see a green mark, if you are incorrect you will see a red cross (see below).</a:t>
+            </a:r>
+          </a:p>
+          <a:p>
+            <a:pPr algn="ctr"/>
+            <a:endParaRPr lang="en-US" dirty="0">
+              <a:solidFill>
+                <a:schemeClr val="bg1"/>
+              </a:solidFill>
+              <a:latin typeface="Arial" panose="020B0604020202020204" pitchFamily="34" charset="0"/>
+              <a:cs typeface="Arial" panose="020B0604020202020204" pitchFamily="34" charset="0"/>
+            </a:endParaRPr>
+          </a:p>
+        </p:txBody>
+      </p:sp>
+      <p:pic>
+        <p:nvPicPr>
+          <p:cNvPr id="5" name="Picture 4">
+            <a:extLst>
+              <a:ext uri="{FF2B5EF4-FFF2-40B4-BE49-F238E27FC236}">
+                <a16:creationId xmlns:a16="http://schemas.microsoft.com/office/drawing/2014/main" id="{3443B4A7-68BB-43E2-9347-5989CDB22A48}"/>
+              </a:ext>
+            </a:extLst>
+          </p:cNvPr>
+          <p:cNvPicPr>
+            <a:picLocks noChangeAspect="1"/>
+          </p:cNvPicPr>
+          <p:nvPr/>
+        </p:nvPicPr>
+        <p:blipFill rotWithShape="1">
+          <a:blip r:embed="rId3"/>
+          <a:srcRect l="14397" r="12612"/>
+          <a:stretch/>
+        </p:blipFill>
+        <p:spPr>
+          <a:xfrm>
+            <a:off x="3303380" y="1781977"/>
+            <a:ext cx="2444278" cy="1883664"/>
+          </a:xfrm>
+          <a:prstGeom prst="rect">
+            <a:avLst/>
+          </a:prstGeom>
+          <a:ln w="28575">
+            <a:solidFill>
+              <a:schemeClr val="tx1"/>
+            </a:solidFill>
+          </a:ln>
+        </p:spPr>
+      </p:pic>
+      <p:pic>
+        <p:nvPicPr>
+          <p:cNvPr id="11" name="Picture 10">
+            <a:extLst>
+              <a:ext uri="{FF2B5EF4-FFF2-40B4-BE49-F238E27FC236}">
+                <a16:creationId xmlns:a16="http://schemas.microsoft.com/office/drawing/2014/main" id="{27B7EFBA-472A-A921-86E9-2A3306347441}"/>
+              </a:ext>
+            </a:extLst>
+          </p:cNvPr>
+          <p:cNvPicPr>
+            <a:picLocks noChangeAspect="1"/>
+          </p:cNvPicPr>
+          <p:nvPr/>
+        </p:nvPicPr>
+        <p:blipFill rotWithShape="1">
+          <a:blip r:embed="rId4"/>
+          <a:srcRect l="13058" r="13950"/>
+          <a:stretch/>
+        </p:blipFill>
+        <p:spPr>
+          <a:xfrm>
+            <a:off x="6096000" y="1759061"/>
+            <a:ext cx="2444278" cy="1883664"/>
+          </a:xfrm>
+          <a:prstGeom prst="rect">
+            <a:avLst/>
+          </a:prstGeom>
+          <a:ln w="28575">
+            <a:solidFill>
+              <a:schemeClr val="tx1"/>
+            </a:solidFill>
+          </a:ln>
+        </p:spPr>
+      </p:pic>
+      <p:sp>
+        <p:nvSpPr>
+          <p:cNvPr id="13" name="Rectangle 12">
+            <a:extLst>
+              <a:ext uri="{FF2B5EF4-FFF2-40B4-BE49-F238E27FC236}">
+                <a16:creationId xmlns:a16="http://schemas.microsoft.com/office/drawing/2014/main" id="{FF4E2701-90D0-8EBF-BB37-CAADF85D0F82}"/>
+              </a:ext>
+            </a:extLst>
+          </p:cNvPr>
+          <p:cNvSpPr/>
+          <p:nvPr/>
+        </p:nvSpPr>
+        <p:spPr>
+          <a:xfrm>
+            <a:off x="522790" y="4070357"/>
+            <a:ext cx="11146420" cy="1754326"/>
+          </a:xfrm>
+          <a:prstGeom prst="rect">
+            <a:avLst/>
+          </a:prstGeom>
+        </p:spPr>
+        <p:txBody>
+          <a:bodyPr wrap="square">
+            <a:spAutoFit/>
+          </a:bodyPr>
+          <a:lstStyle/>
+          <a:p>
+            <a:pPr algn="ctr"/>
+            <a:r>
+              <a:rPr lang="en-US" dirty="0">
+                <a:solidFill>
+                  <a:schemeClr val="bg1"/>
+                </a:solidFill>
+                <a:latin typeface="Arial" panose="020B0604020202020204" pitchFamily="34" charset="0"/>
+                <a:cs typeface="Arial" panose="020B0604020202020204" pitchFamily="34" charset="0"/>
+              </a:rPr>
+              <a:t>You can earn bonus money (up to $10) if you choose the Correct answer.</a:t>
+            </a:r>
+          </a:p>
+          <a:p>
+            <a:pPr algn="ctr"/>
+            <a:endParaRPr lang="en-US" dirty="0">
+              <a:solidFill>
+                <a:schemeClr val="bg1"/>
+              </a:solidFill>
+              <a:latin typeface="Arial" panose="020B0604020202020204" pitchFamily="34" charset="0"/>
+              <a:cs typeface="Arial" panose="020B0604020202020204" pitchFamily="34" charset="0"/>
+            </a:endParaRPr>
+          </a:p>
+          <a:p>
+            <a:pPr algn="ctr"/>
+            <a:r>
+              <a:rPr lang="en-US" dirty="0">
+                <a:solidFill>
+                  <a:schemeClr val="bg1"/>
+                </a:solidFill>
+                <a:latin typeface="Arial" panose="020B0604020202020204" pitchFamily="34" charset="0"/>
+                <a:cs typeface="Arial" panose="020B0604020202020204" pitchFamily="34" charset="0"/>
+              </a:rPr>
+              <a:t>You will have up to 3 seconds to make your decision.</a:t>
+            </a:r>
+          </a:p>
+          <a:p>
+            <a:pPr algn="ctr"/>
+            <a:endParaRPr lang="en-US" dirty="0">
+              <a:solidFill>
+                <a:schemeClr val="bg1"/>
+              </a:solidFill>
+              <a:latin typeface="Arial" panose="020B0604020202020204" pitchFamily="34" charset="0"/>
+              <a:cs typeface="Arial" panose="020B0604020202020204" pitchFamily="34" charset="0"/>
+            </a:endParaRPr>
+          </a:p>
+          <a:p>
+            <a:pPr algn="ctr"/>
+            <a:r>
+              <a:rPr lang="en-US" dirty="0">
+                <a:solidFill>
+                  <a:schemeClr val="bg1"/>
+                </a:solidFill>
+                <a:latin typeface="Arial" panose="020B0604020202020204" pitchFamily="34" charset="0"/>
+                <a:cs typeface="Arial" panose="020B0604020202020204" pitchFamily="34" charset="0"/>
+              </a:rPr>
+              <a:t>If you are too slow to respond, you will see “TOO SLOW” on the screen, </a:t>
+            </a:r>
+          </a:p>
+          <a:p>
+            <a:pPr algn="ctr"/>
+            <a:r>
+              <a:rPr lang="en-US" dirty="0">
+                <a:solidFill>
+                  <a:schemeClr val="bg1"/>
+                </a:solidFill>
+                <a:latin typeface="Arial" panose="020B0604020202020204" pitchFamily="34" charset="0"/>
+                <a:cs typeface="Arial" panose="020B0604020202020204" pitchFamily="34" charset="0"/>
+              </a:rPr>
+              <a:t>your answer will be considered Incorrect and you will not earn bonus money for that decision.  </a:t>
+            </a:r>
+          </a:p>
+        </p:txBody>
+      </p:sp>
+      <p:sp>
+        <p:nvSpPr>
+          <p:cNvPr id="14" name="Rectangle 13">
+            <a:extLst>
+              <a:ext uri="{FF2B5EF4-FFF2-40B4-BE49-F238E27FC236}">
+                <a16:creationId xmlns:a16="http://schemas.microsoft.com/office/drawing/2014/main" id="{DB938466-D0C1-1E66-294B-53BD28A2D9F7}"/>
+              </a:ext>
+            </a:extLst>
+          </p:cNvPr>
+          <p:cNvSpPr/>
+          <p:nvPr/>
+        </p:nvSpPr>
+        <p:spPr>
+          <a:xfrm>
+            <a:off x="3303379" y="1377261"/>
+            <a:ext cx="2444279" cy="646331"/>
+          </a:xfrm>
+          <a:prstGeom prst="rect">
+            <a:avLst/>
+          </a:prstGeom>
+        </p:spPr>
+        <p:txBody>
+          <a:bodyPr wrap="square">
+            <a:spAutoFit/>
+          </a:bodyPr>
+          <a:lstStyle/>
+          <a:p>
+            <a:pPr algn="ctr"/>
+            <a:r>
+              <a:rPr lang="en-US" dirty="0">
+                <a:latin typeface="Arial" panose="020B0604020202020204" pitchFamily="34" charset="0"/>
+                <a:cs typeface="Arial" panose="020B0604020202020204" pitchFamily="34" charset="0"/>
+              </a:rPr>
+              <a:t>Correct</a:t>
+            </a:r>
+          </a:p>
+          <a:p>
+            <a:pPr algn="ctr"/>
+            <a:endParaRPr lang="en-US" dirty="0">
+              <a:latin typeface="Arial" panose="020B0604020202020204" pitchFamily="34" charset="0"/>
+              <a:cs typeface="Arial" panose="020B0604020202020204" pitchFamily="34" charset="0"/>
+            </a:endParaRPr>
+          </a:p>
+        </p:txBody>
+      </p:sp>
+      <p:sp>
+        <p:nvSpPr>
+          <p:cNvPr id="16" name="Rectangle 15">
+            <a:extLst>
+              <a:ext uri="{FF2B5EF4-FFF2-40B4-BE49-F238E27FC236}">
+                <a16:creationId xmlns:a16="http://schemas.microsoft.com/office/drawing/2014/main" id="{FD05AF02-1E11-A6B3-D788-D3F61E351C56}"/>
+              </a:ext>
+            </a:extLst>
+          </p:cNvPr>
+          <p:cNvSpPr/>
+          <p:nvPr/>
+        </p:nvSpPr>
+        <p:spPr>
+          <a:xfrm>
+            <a:off x="6096000" y="1377261"/>
+            <a:ext cx="2444277" cy="646331"/>
+          </a:xfrm>
+          <a:prstGeom prst="rect">
+            <a:avLst/>
+          </a:prstGeom>
+        </p:spPr>
+        <p:txBody>
+          <a:bodyPr wrap="square">
+            <a:spAutoFit/>
+          </a:bodyPr>
+          <a:lstStyle/>
+          <a:p>
+            <a:pPr algn="ctr"/>
+            <a:r>
+              <a:rPr lang="en-US" dirty="0">
+                <a:latin typeface="Arial" panose="020B0604020202020204" pitchFamily="34" charset="0"/>
+                <a:cs typeface="Arial" panose="020B0604020202020204" pitchFamily="34" charset="0"/>
+              </a:rPr>
+              <a:t>Incorrect</a:t>
+            </a:r>
+          </a:p>
+          <a:p>
+            <a:pPr algn="ctr"/>
+            <a:endParaRPr lang="en-US" dirty="0">
+              <a:latin typeface="Arial" panose="020B0604020202020204" pitchFamily="34" charset="0"/>
+              <a:cs typeface="Arial" panose="020B0604020202020204" pitchFamily="34" charset="0"/>
+            </a:endParaRPr>
+          </a:p>
+        </p:txBody>
+      </p:sp>
+    </p:spTree>
+    <p:extLst>
+      <p:ext uri="{BB962C8B-B14F-4D97-AF65-F5344CB8AC3E}">
+        <p14:creationId xmlns:p14="http://schemas.microsoft.com/office/powerpoint/2010/main" val="1521068442"/>
+      </p:ext>
+    </p:extLst>
+  </p:cSld>
+  <p:clrMapOvr>
+    <a:masterClrMapping/>
+  </p:clrMapOvr>
+</p:sld>
+</file>
+
+<file path=ppt/slides/slide5.xml><?xml version="1.0" encoding="utf-8"?>
+<p:sld xmlns:a="http://schemas.openxmlformats.org/drawingml/2006/main" xmlns:r="http://schemas.openxmlformats.org/officeDocument/2006/relationships" xmlns:p="http://schemas.openxmlformats.org/presentationml/2006/main">
+  <p:cSld>
+    <p:spTree>
+      <p:nvGrpSpPr>
+        <p:cNvPr id="1" name=""/>
+        <p:cNvGrpSpPr/>
+        <p:nvPr/>
+      </p:nvGrpSpPr>
+      <p:grpSpPr>
+        <a:xfrm>
+          <a:off x="0" y="0"/>
+          <a:ext cx="0" cy="0"/>
+          <a:chOff x="0" y="0"/>
+          <a:chExt cx="0" cy="0"/>
+        </a:xfrm>
+      </p:grpSpPr>
+      <p:sp>
+        <p:nvSpPr>
+          <p:cNvPr id="4" name="Rectangle 3">
+            <a:extLst>
+              <a:ext uri="{FF2B5EF4-FFF2-40B4-BE49-F238E27FC236}">
+                <a16:creationId xmlns:a16="http://schemas.microsoft.com/office/drawing/2014/main" id="{01836649-3BFB-BC41-8DB9-D358D1B458BD}"/>
+              </a:ext>
+            </a:extLst>
+          </p:cNvPr>
+          <p:cNvSpPr/>
+          <p:nvPr/>
+        </p:nvSpPr>
+        <p:spPr>
+          <a:xfrm>
+            <a:off x="0" y="0"/>
+            <a:ext cx="12192000" cy="6858000"/>
+          </a:xfrm>
+          <a:prstGeom prst="rect">
+            <a:avLst/>
+          </a:prstGeom>
+          <a:solidFill>
+            <a:srgbClr val="808080"/>
+          </a:solidFill>
+          <a:ln>
+            <a:noFill/>
+          </a:ln>
+        </p:spPr>
+        <p:style>
+          <a:lnRef idx="2">
+            <a:schemeClr val="accent1">
+              <a:shade val="50000"/>
+            </a:schemeClr>
+          </a:lnRef>
+          <a:fillRef idx="1">
+            <a:schemeClr val="accent1"/>
+          </a:fillRef>
+          <a:effectRef idx="0">
+            <a:schemeClr val="accent1"/>
+          </a:effectRef>
+          <a:fontRef idx="minor">
+            <a:schemeClr val="lt1"/>
+          </a:fontRef>
+        </p:style>
+        <p:txBody>
+          <a:bodyPr rtlCol="0" anchor="ctr"/>
+          <a:lstStyle/>
+          <a:p>
+            <a:pPr marL="0" algn="ctr" defTabSz="914400" rtl="0" eaLnBrk="1" latinLnBrk="0" hangingPunct="1"/>
+            <a:endParaRPr lang="en-US" dirty="0"/>
+          </a:p>
+        </p:txBody>
+      </p:sp>
+      <p:pic>
+        <p:nvPicPr>
+          <p:cNvPr id="7" name="Picture 6">
+            <a:extLst>
+              <a:ext uri="{FF2B5EF4-FFF2-40B4-BE49-F238E27FC236}">
+                <a16:creationId xmlns:a16="http://schemas.microsoft.com/office/drawing/2014/main" id="{50AAA599-E202-233D-CEBF-2A4936DD41FE}"/>
+              </a:ext>
+            </a:extLst>
+          </p:cNvPr>
+          <p:cNvPicPr>
+            <a:picLocks noChangeAspect="1"/>
+          </p:cNvPicPr>
+          <p:nvPr/>
+        </p:nvPicPr>
+        <p:blipFill>
+          <a:blip r:embed="rId3"/>
+          <a:stretch>
+            <a:fillRect/>
+          </a:stretch>
+        </p:blipFill>
+        <p:spPr>
+          <a:xfrm>
+            <a:off x="4778202" y="1952368"/>
+            <a:ext cx="2885993" cy="2737391"/>
+          </a:xfrm>
+          <a:prstGeom prst="rect">
+            <a:avLst/>
+          </a:prstGeom>
+        </p:spPr>
+      </p:pic>
+    </p:spTree>
+    <p:extLst>
+      <p:ext uri="{BB962C8B-B14F-4D97-AF65-F5344CB8AC3E}">
+        <p14:creationId xmlns:p14="http://schemas.microsoft.com/office/powerpoint/2010/main" val="1511443662"/>
       </p:ext>
     </p:extLst>
   </p:cSld>
@@ -5648,356 +7075,12 @@
           </a:p>
         </p:txBody>
       </p:sp>
-      <p:sp>
-        <p:nvSpPr>
-          <p:cNvPr id="8" name="Rectangle 7">
-            <a:extLst>
-              <a:ext uri="{FF2B5EF4-FFF2-40B4-BE49-F238E27FC236}">
-                <a16:creationId xmlns:a16="http://schemas.microsoft.com/office/drawing/2014/main" id="{1FF0DAA0-A0FD-6A46-9490-CA00AB61643F}"/>
-              </a:ext>
-            </a:extLst>
-          </p:cNvPr>
-          <p:cNvSpPr/>
-          <p:nvPr/>
-        </p:nvSpPr>
-        <p:spPr>
-          <a:xfrm>
-            <a:off x="650009" y="654162"/>
-            <a:ext cx="11146420" cy="2585323"/>
-          </a:xfrm>
-          <a:prstGeom prst="rect">
-            <a:avLst/>
-          </a:prstGeom>
-        </p:spPr>
-        <p:txBody>
-          <a:bodyPr wrap="square">
-            <a:spAutoFit/>
-          </a:bodyPr>
-          <a:lstStyle/>
-          <a:p>
-            <a:pPr algn="ctr"/>
-            <a:r>
-              <a:rPr lang="en-US" dirty="0">
-                <a:solidFill>
-                  <a:schemeClr val="bg1"/>
-                </a:solidFill>
-                <a:latin typeface="Arial" panose="020B0604020202020204" pitchFamily="34" charset="0"/>
-                <a:cs typeface="Arial" panose="020B0604020202020204" pitchFamily="34" charset="0"/>
-              </a:rPr>
-              <a:t>Welcome to the experiment!</a:t>
-            </a:r>
-          </a:p>
-          <a:p>
-            <a:pPr algn="ctr"/>
-            <a:endParaRPr lang="en-US" dirty="0">
-              <a:solidFill>
-                <a:schemeClr val="bg1"/>
-              </a:solidFill>
-              <a:latin typeface="Arial" panose="020B0604020202020204" pitchFamily="34" charset="0"/>
-              <a:cs typeface="Arial" panose="020B0604020202020204" pitchFamily="34" charset="0"/>
-            </a:endParaRPr>
-          </a:p>
-          <a:p>
-            <a:pPr algn="ctr"/>
-            <a:r>
-              <a:rPr lang="en-US" dirty="0">
-                <a:solidFill>
-                  <a:schemeClr val="bg1"/>
-                </a:solidFill>
-                <a:latin typeface="Arial" panose="020B0604020202020204" pitchFamily="34" charset="0"/>
-                <a:cs typeface="Arial" panose="020B0604020202020204" pitchFamily="34" charset="0"/>
-              </a:rPr>
-              <a:t>In this experiment, we will show you pairs of images presented one after the other. </a:t>
-            </a:r>
-          </a:p>
-          <a:p>
-            <a:pPr algn="ctr"/>
-            <a:r>
-              <a:rPr lang="en-US" dirty="0">
-                <a:solidFill>
-                  <a:schemeClr val="bg1"/>
-                </a:solidFill>
-                <a:latin typeface="Arial" panose="020B0604020202020204" pitchFamily="34" charset="0"/>
-                <a:cs typeface="Arial" panose="020B0604020202020204" pitchFamily="34" charset="0"/>
-              </a:rPr>
-              <a:t>Your task is to decide which one is the Correct one. </a:t>
-            </a:r>
-          </a:p>
-          <a:p>
-            <a:pPr algn="ctr"/>
-            <a:endParaRPr lang="en-US" dirty="0">
-              <a:solidFill>
-                <a:schemeClr val="bg1"/>
-              </a:solidFill>
-              <a:latin typeface="Arial" panose="020B0604020202020204" pitchFamily="34" charset="0"/>
-              <a:cs typeface="Arial" panose="020B0604020202020204" pitchFamily="34" charset="0"/>
-            </a:endParaRPr>
-          </a:p>
-          <a:p>
-            <a:pPr algn="ctr"/>
-            <a:r>
-              <a:rPr lang="en-US" dirty="0">
-                <a:solidFill>
-                  <a:schemeClr val="bg1"/>
-                </a:solidFill>
-                <a:latin typeface="Arial" panose="020B0604020202020204" pitchFamily="34" charset="0"/>
-                <a:cs typeface="Arial" panose="020B0604020202020204" pitchFamily="34" charset="0"/>
-              </a:rPr>
-              <a:t>When the black square appears on the screen, you will have 2 seconds to press the SPACE bar. </a:t>
-            </a:r>
-          </a:p>
-          <a:p>
-            <a:pPr algn="ctr"/>
-            <a:r>
-              <a:rPr lang="en-US" dirty="0">
-                <a:solidFill>
-                  <a:schemeClr val="bg1"/>
-                </a:solidFill>
-                <a:latin typeface="Arial" panose="020B0604020202020204" pitchFamily="34" charset="0"/>
-                <a:cs typeface="Arial" panose="020B0604020202020204" pitchFamily="34" charset="0"/>
-              </a:rPr>
-              <a:t>Then, the two images will appear one after the other.</a:t>
-            </a:r>
-          </a:p>
-          <a:p>
-            <a:pPr algn="ctr"/>
-            <a:endParaRPr lang="en-US" dirty="0">
-              <a:solidFill>
-                <a:schemeClr val="bg1"/>
-              </a:solidFill>
-              <a:latin typeface="Arial" panose="020B0604020202020204" pitchFamily="34" charset="0"/>
-              <a:cs typeface="Arial" panose="020B0604020202020204" pitchFamily="34" charset="0"/>
-            </a:endParaRPr>
-          </a:p>
-          <a:p>
-            <a:pPr algn="ctr"/>
-            <a:r>
-              <a:rPr lang="en-US" dirty="0">
-                <a:solidFill>
-                  <a:schemeClr val="bg1"/>
-                </a:solidFill>
-                <a:latin typeface="Arial" panose="020B0604020202020204" pitchFamily="34" charset="0"/>
-                <a:cs typeface="Arial" panose="020B0604020202020204" pitchFamily="34" charset="0"/>
-              </a:rPr>
-              <a:t> When you see a ”+” sign on the screen, you may enter either the “D” or “K” keys to make a decision.</a:t>
-            </a:r>
-          </a:p>
-        </p:txBody>
-      </p:sp>
-      <p:sp>
-        <p:nvSpPr>
-          <p:cNvPr id="2" name="Rectangle 1">
-            <a:extLst>
-              <a:ext uri="{FF2B5EF4-FFF2-40B4-BE49-F238E27FC236}">
-                <a16:creationId xmlns:a16="http://schemas.microsoft.com/office/drawing/2014/main" id="{DBFAA427-A748-3FFD-50FD-6A14C9ED75A7}"/>
-              </a:ext>
-            </a:extLst>
-          </p:cNvPr>
-          <p:cNvSpPr/>
-          <p:nvPr/>
-        </p:nvSpPr>
-        <p:spPr>
-          <a:xfrm>
-            <a:off x="3681552" y="3569575"/>
-            <a:ext cx="2365960" cy="1879430"/>
-          </a:xfrm>
-          <a:prstGeom prst="rect">
-            <a:avLst/>
-          </a:prstGeom>
-          <a:solidFill>
-            <a:srgbClr val="808080"/>
-          </a:solidFill>
-          <a:ln w="28575">
-            <a:solidFill>
-              <a:schemeClr val="tx1"/>
-            </a:solidFill>
-          </a:ln>
-        </p:spPr>
-        <p:style>
-          <a:lnRef idx="2">
-            <a:schemeClr val="accent1">
-              <a:shade val="50000"/>
-            </a:schemeClr>
-          </a:lnRef>
-          <a:fillRef idx="1">
-            <a:schemeClr val="accent1"/>
-          </a:fillRef>
-          <a:effectRef idx="0">
-            <a:schemeClr val="accent1"/>
-          </a:effectRef>
-          <a:fontRef idx="minor">
-            <a:schemeClr val="lt1"/>
-          </a:fontRef>
-        </p:style>
-        <p:txBody>
-          <a:bodyPr rtlCol="0" anchor="ctr"/>
-          <a:lstStyle/>
-          <a:p>
-            <a:pPr marL="0" algn="ctr" defTabSz="914400" rtl="0" eaLnBrk="1" latinLnBrk="0" hangingPunct="1"/>
-            <a:endParaRPr lang="en-US"/>
-          </a:p>
-        </p:txBody>
-      </p:sp>
-      <p:cxnSp>
-        <p:nvCxnSpPr>
-          <p:cNvPr id="3" name="Straight Arrow Connector 2">
-            <a:extLst>
-              <a:ext uri="{FF2B5EF4-FFF2-40B4-BE49-F238E27FC236}">
-                <a16:creationId xmlns:a16="http://schemas.microsoft.com/office/drawing/2014/main" id="{CD7546D7-3D8E-72C4-2F26-D14BEFC65230}"/>
-              </a:ext>
-            </a:extLst>
-          </p:cNvPr>
-          <p:cNvCxnSpPr>
-            <a:cxnSpLocks/>
-          </p:cNvCxnSpPr>
-          <p:nvPr/>
-        </p:nvCxnSpPr>
-        <p:spPr>
-          <a:xfrm>
-            <a:off x="6063981" y="4499321"/>
-            <a:ext cx="274320" cy="0"/>
-          </a:xfrm>
-          <a:prstGeom prst="straightConnector1">
-            <a:avLst/>
-          </a:prstGeom>
-          <a:ln w="57150">
-            <a:solidFill>
-              <a:schemeClr val="tx1"/>
-            </a:solidFill>
-            <a:tailEnd type="triangle"/>
-          </a:ln>
-        </p:spPr>
-        <p:style>
-          <a:lnRef idx="1">
-            <a:schemeClr val="accent1"/>
-          </a:lnRef>
-          <a:fillRef idx="0">
-            <a:schemeClr val="accent1"/>
-          </a:fillRef>
-          <a:effectRef idx="0">
-            <a:schemeClr val="accent1"/>
-          </a:effectRef>
-          <a:fontRef idx="minor">
-            <a:schemeClr val="tx1"/>
-          </a:fontRef>
-        </p:style>
-      </p:cxnSp>
-      <p:sp>
-        <p:nvSpPr>
-          <p:cNvPr id="5" name="Rectangle 4">
-            <a:extLst>
-              <a:ext uri="{FF2B5EF4-FFF2-40B4-BE49-F238E27FC236}">
-                <a16:creationId xmlns:a16="http://schemas.microsoft.com/office/drawing/2014/main" id="{1DF5FE29-F88D-573A-605B-30CF7DEA6919}"/>
-              </a:ext>
-            </a:extLst>
-          </p:cNvPr>
-          <p:cNvSpPr/>
-          <p:nvPr/>
-        </p:nvSpPr>
-        <p:spPr>
-          <a:xfrm>
-            <a:off x="6354770" y="3569575"/>
-            <a:ext cx="2365960" cy="1879430"/>
-          </a:xfrm>
-          <a:prstGeom prst="rect">
-            <a:avLst/>
-          </a:prstGeom>
-          <a:solidFill>
-            <a:srgbClr val="808080"/>
-          </a:solidFill>
-          <a:ln w="28575">
-            <a:solidFill>
-              <a:schemeClr val="tx1"/>
-            </a:solidFill>
-          </a:ln>
-        </p:spPr>
-        <p:style>
-          <a:lnRef idx="2">
-            <a:schemeClr val="accent1">
-              <a:shade val="50000"/>
-            </a:schemeClr>
-          </a:lnRef>
-          <a:fillRef idx="1">
-            <a:schemeClr val="accent1"/>
-          </a:fillRef>
-          <a:effectRef idx="0">
-            <a:schemeClr val="accent1"/>
-          </a:effectRef>
-          <a:fontRef idx="minor">
-            <a:schemeClr val="lt1"/>
-          </a:fontRef>
-        </p:style>
-        <p:txBody>
-          <a:bodyPr rtlCol="0" anchor="ctr"/>
-          <a:lstStyle/>
-          <a:p>
-            <a:pPr marL="0" algn="ctr" defTabSz="914400" rtl="0" eaLnBrk="1" latinLnBrk="0" hangingPunct="1"/>
-            <a:endParaRPr lang="en-US"/>
-          </a:p>
-        </p:txBody>
-      </p:sp>
-      <p:sp>
-        <p:nvSpPr>
-          <p:cNvPr id="6" name="Rectangle 5">
-            <a:extLst>
-              <a:ext uri="{FF2B5EF4-FFF2-40B4-BE49-F238E27FC236}">
-                <a16:creationId xmlns:a16="http://schemas.microsoft.com/office/drawing/2014/main" id="{DFDDD23C-C956-A786-61A4-EBA778B26D03}"/>
-              </a:ext>
-            </a:extLst>
-          </p:cNvPr>
-          <p:cNvSpPr/>
-          <p:nvPr/>
-        </p:nvSpPr>
-        <p:spPr>
-          <a:xfrm>
-            <a:off x="4345569" y="3984833"/>
-            <a:ext cx="1097280" cy="1097280"/>
-          </a:xfrm>
-          <a:prstGeom prst="rect">
-            <a:avLst/>
-          </a:prstGeom>
-          <a:solidFill>
-            <a:schemeClr val="bg1"/>
-          </a:solidFill>
-          <a:ln>
-            <a:solidFill>
-              <a:schemeClr val="bg1">
-                <a:lumMod val="85000"/>
-              </a:schemeClr>
-            </a:solidFill>
-          </a:ln>
-        </p:spPr>
-        <p:style>
-          <a:lnRef idx="2">
-            <a:schemeClr val="accent1">
-              <a:shade val="50000"/>
-            </a:schemeClr>
-          </a:lnRef>
-          <a:fillRef idx="1">
-            <a:schemeClr val="accent1"/>
-          </a:fillRef>
-          <a:effectRef idx="0">
-            <a:schemeClr val="accent1"/>
-          </a:effectRef>
-          <a:fontRef idx="minor">
-            <a:schemeClr val="lt1"/>
-          </a:fontRef>
-        </p:style>
-        <p:txBody>
-          <a:bodyPr rtlCol="0" anchor="ctr"/>
-          <a:lstStyle/>
-          <a:p>
-            <a:pPr algn="ctr"/>
-            <a:endParaRPr lang="en-US"/>
-          </a:p>
-        </p:txBody>
-      </p:sp>
       <p:pic>
         <p:nvPicPr>
-          <p:cNvPr id="7" name="Picture 6">
-            <a:extLst>
-              <a:ext uri="{FF2B5EF4-FFF2-40B4-BE49-F238E27FC236}">
-                <a16:creationId xmlns:a16="http://schemas.microsoft.com/office/drawing/2014/main" id="{2CBC2D43-A546-3717-8FEE-D34449D6B163}"/>
+          <p:cNvPr id="2" name="Picture 1">
+            <a:extLst>
+              <a:ext uri="{FF2B5EF4-FFF2-40B4-BE49-F238E27FC236}">
+                <a16:creationId xmlns:a16="http://schemas.microsoft.com/office/drawing/2014/main" id="{E0DF0AC2-3597-2ECC-9B56-1D9EFBED2BB8}"/>
               </a:ext>
             </a:extLst>
           </p:cNvPr>
@@ -6014,556 +7097,8 @@
         </p:blipFill>
         <p:spPr>
           <a:xfrm>
-            <a:off x="4437009" y="4073612"/>
-            <a:ext cx="914400" cy="914400"/>
-          </a:xfrm>
-          <a:prstGeom prst="rect">
-            <a:avLst/>
-          </a:prstGeom>
-        </p:spPr>
-      </p:pic>
-      <p:sp>
-        <p:nvSpPr>
-          <p:cNvPr id="9" name="Rectangle 8">
-            <a:extLst>
-              <a:ext uri="{FF2B5EF4-FFF2-40B4-BE49-F238E27FC236}">
-                <a16:creationId xmlns:a16="http://schemas.microsoft.com/office/drawing/2014/main" id="{C4B2A69B-1E44-8304-9D3A-A447E92A7FF2}"/>
-              </a:ext>
-            </a:extLst>
-          </p:cNvPr>
-          <p:cNvSpPr/>
-          <p:nvPr/>
-        </p:nvSpPr>
-        <p:spPr>
-          <a:xfrm>
-            <a:off x="7006990" y="3968529"/>
-            <a:ext cx="1097280" cy="1097280"/>
-          </a:xfrm>
-          <a:prstGeom prst="rect">
-            <a:avLst/>
-          </a:prstGeom>
-          <a:solidFill>
-            <a:schemeClr val="bg1"/>
-          </a:solidFill>
-          <a:ln>
-            <a:solidFill>
-              <a:schemeClr val="bg1">
-                <a:lumMod val="85000"/>
-              </a:schemeClr>
-            </a:solidFill>
-          </a:ln>
-        </p:spPr>
-        <p:style>
-          <a:lnRef idx="2">
-            <a:schemeClr val="accent1">
-              <a:shade val="50000"/>
-            </a:schemeClr>
-          </a:lnRef>
-          <a:fillRef idx="1">
-            <a:schemeClr val="accent1"/>
-          </a:fillRef>
-          <a:effectRef idx="0">
-            <a:schemeClr val="accent1"/>
-          </a:effectRef>
-          <a:fontRef idx="minor">
-            <a:schemeClr val="lt1"/>
-          </a:fontRef>
-        </p:style>
-        <p:txBody>
-          <a:bodyPr rtlCol="0" anchor="ctr"/>
-          <a:lstStyle/>
-          <a:p>
-            <a:pPr algn="ctr"/>
-            <a:endParaRPr lang="en-US"/>
-          </a:p>
-        </p:txBody>
-      </p:sp>
-      <p:pic>
-        <p:nvPicPr>
-          <p:cNvPr id="10" name="Picture 9">
-            <a:extLst>
-              <a:ext uri="{FF2B5EF4-FFF2-40B4-BE49-F238E27FC236}">
-                <a16:creationId xmlns:a16="http://schemas.microsoft.com/office/drawing/2014/main" id="{EA2610B1-1E31-87DA-BA12-FC291F644112}"/>
-              </a:ext>
-            </a:extLst>
-          </p:cNvPr>
-          <p:cNvPicPr>
-            <a:picLocks noChangeAspect="1"/>
-          </p:cNvPicPr>
-          <p:nvPr/>
-        </p:nvPicPr>
-        <p:blipFill>
-          <a:blip r:embed="rId4"/>
-          <a:stretch>
-            <a:fillRect/>
-          </a:stretch>
-        </p:blipFill>
-        <p:spPr>
-          <a:xfrm>
-            <a:off x="7102800" y="4059969"/>
-            <a:ext cx="914400" cy="914400"/>
-          </a:xfrm>
-          <a:prstGeom prst="rect">
-            <a:avLst/>
-          </a:prstGeom>
-        </p:spPr>
-      </p:pic>
-      <p:cxnSp>
-        <p:nvCxnSpPr>
-          <p:cNvPr id="11" name="Straight Arrow Connector 10">
-            <a:extLst>
-              <a:ext uri="{FF2B5EF4-FFF2-40B4-BE49-F238E27FC236}">
-                <a16:creationId xmlns:a16="http://schemas.microsoft.com/office/drawing/2014/main" id="{2AB24696-3103-7797-94B2-B4CBAD69E3D1}"/>
-              </a:ext>
-            </a:extLst>
-          </p:cNvPr>
-          <p:cNvCxnSpPr>
-            <a:cxnSpLocks/>
-          </p:cNvCxnSpPr>
-          <p:nvPr/>
-        </p:nvCxnSpPr>
-        <p:spPr>
-          <a:xfrm>
-            <a:off x="8724136" y="4499321"/>
-            <a:ext cx="274320" cy="0"/>
-          </a:xfrm>
-          <a:prstGeom prst="straightConnector1">
-            <a:avLst/>
-          </a:prstGeom>
-          <a:ln w="57150">
-            <a:solidFill>
-              <a:schemeClr val="tx1"/>
-            </a:solidFill>
-            <a:tailEnd type="triangle"/>
-          </a:ln>
-        </p:spPr>
-        <p:style>
-          <a:lnRef idx="1">
-            <a:schemeClr val="accent1"/>
-          </a:lnRef>
-          <a:fillRef idx="0">
-            <a:schemeClr val="accent1"/>
-          </a:fillRef>
-          <a:effectRef idx="0">
-            <a:schemeClr val="accent1"/>
-          </a:effectRef>
-          <a:fontRef idx="minor">
-            <a:schemeClr val="tx1"/>
-          </a:fontRef>
-        </p:style>
-      </p:cxnSp>
-      <p:sp>
-        <p:nvSpPr>
-          <p:cNvPr id="12" name="Rectangle 11">
-            <a:extLst>
-              <a:ext uri="{FF2B5EF4-FFF2-40B4-BE49-F238E27FC236}">
-                <a16:creationId xmlns:a16="http://schemas.microsoft.com/office/drawing/2014/main" id="{7BB10A50-4315-81FE-85EF-ACA7A858E894}"/>
-              </a:ext>
-            </a:extLst>
-          </p:cNvPr>
-          <p:cNvSpPr/>
-          <p:nvPr/>
-        </p:nvSpPr>
-        <p:spPr>
-          <a:xfrm>
-            <a:off x="9014925" y="3569575"/>
-            <a:ext cx="2365960" cy="1879430"/>
-          </a:xfrm>
-          <a:prstGeom prst="rect">
-            <a:avLst/>
-          </a:prstGeom>
-          <a:solidFill>
-            <a:srgbClr val="808080"/>
-          </a:solidFill>
-          <a:ln w="28575">
-            <a:solidFill>
-              <a:schemeClr val="tx1"/>
-            </a:solidFill>
-          </a:ln>
-        </p:spPr>
-        <p:style>
-          <a:lnRef idx="2">
-            <a:schemeClr val="accent1">
-              <a:shade val="50000"/>
-            </a:schemeClr>
-          </a:lnRef>
-          <a:fillRef idx="1">
-            <a:schemeClr val="accent1"/>
-          </a:fillRef>
-          <a:effectRef idx="0">
-            <a:schemeClr val="accent1"/>
-          </a:effectRef>
-          <a:fontRef idx="minor">
-            <a:schemeClr val="lt1"/>
-          </a:fontRef>
-        </p:style>
-        <p:txBody>
-          <a:bodyPr rtlCol="0" anchor="ctr"/>
-          <a:lstStyle/>
-          <a:p>
-            <a:pPr marL="0" algn="ctr" defTabSz="914400" rtl="0" eaLnBrk="1" latinLnBrk="0" hangingPunct="1"/>
-            <a:endParaRPr lang="en-US"/>
-          </a:p>
-        </p:txBody>
-      </p:sp>
-      <p:sp>
-        <p:nvSpPr>
-          <p:cNvPr id="13" name="Rectangle 12">
-            <a:extLst>
-              <a:ext uri="{FF2B5EF4-FFF2-40B4-BE49-F238E27FC236}">
-                <a16:creationId xmlns:a16="http://schemas.microsoft.com/office/drawing/2014/main" id="{960D1D91-570C-DACE-4151-EF4DEAF7C379}"/>
-              </a:ext>
-            </a:extLst>
-          </p:cNvPr>
-          <p:cNvSpPr/>
-          <p:nvPr/>
-        </p:nvSpPr>
-        <p:spPr>
-          <a:xfrm>
-            <a:off x="9833894" y="4193819"/>
-            <a:ext cx="728021" cy="630942"/>
-          </a:xfrm>
-          <a:prstGeom prst="rect">
-            <a:avLst/>
-          </a:prstGeom>
-        </p:spPr>
-        <p:txBody>
-          <a:bodyPr wrap="square">
-            <a:spAutoFit/>
-          </a:bodyPr>
-          <a:lstStyle/>
-          <a:p>
-            <a:pPr algn="ctr"/>
-            <a:r>
-              <a:rPr lang="en-US" sz="3500" dirty="0">
-                <a:solidFill>
-                  <a:schemeClr val="bg1"/>
-                </a:solidFill>
-                <a:latin typeface="Arial" panose="020B0604020202020204" pitchFamily="34" charset="0"/>
-                <a:cs typeface="Arial" panose="020B0604020202020204" pitchFamily="34" charset="0"/>
-              </a:rPr>
-              <a:t>+</a:t>
-            </a:r>
-          </a:p>
-        </p:txBody>
-      </p:sp>
-      <p:grpSp>
-        <p:nvGrpSpPr>
-          <p:cNvPr id="14" name="Group 13">
-            <a:extLst>
-              <a:ext uri="{FF2B5EF4-FFF2-40B4-BE49-F238E27FC236}">
-                <a16:creationId xmlns:a16="http://schemas.microsoft.com/office/drawing/2014/main" id="{8415295D-15E4-3851-8FD4-3C46B4D62986}"/>
-              </a:ext>
-            </a:extLst>
-          </p:cNvPr>
-          <p:cNvGrpSpPr>
-            <a:grpSpLocks noChangeAspect="1"/>
-          </p:cNvGrpSpPr>
-          <p:nvPr/>
-        </p:nvGrpSpPr>
-        <p:grpSpPr>
-          <a:xfrm>
-            <a:off x="9254256" y="5498055"/>
-            <a:ext cx="1887295" cy="1097280"/>
-            <a:chOff x="4543496" y="2244478"/>
-            <a:chExt cx="3308070" cy="1923324"/>
-          </a:xfrm>
-        </p:grpSpPr>
-        <p:pic>
-          <p:nvPicPr>
-            <p:cNvPr id="15" name="Picture 14">
-              <a:extLst>
-                <a:ext uri="{FF2B5EF4-FFF2-40B4-BE49-F238E27FC236}">
-                  <a16:creationId xmlns:a16="http://schemas.microsoft.com/office/drawing/2014/main" id="{2D6A68BB-7EF1-52AC-2E42-88E305AE0D75}"/>
-                </a:ext>
-              </a:extLst>
-            </p:cNvPr>
-            <p:cNvPicPr>
-              <a:picLocks noChangeAspect="1"/>
-            </p:cNvPicPr>
-            <p:nvPr/>
-          </p:nvPicPr>
-          <p:blipFill>
-            <a:blip r:embed="rId5"/>
-            <a:stretch>
-              <a:fillRect/>
-            </a:stretch>
-          </p:blipFill>
-          <p:spPr>
-            <a:xfrm>
-              <a:off x="4543496" y="2244478"/>
-              <a:ext cx="3308070" cy="1654035"/>
-            </a:xfrm>
-            <a:prstGeom prst="rect">
-              <a:avLst/>
-            </a:prstGeom>
-          </p:spPr>
-        </p:pic>
-        <p:pic>
-          <p:nvPicPr>
-            <p:cNvPr id="16" name="Picture 15">
-              <a:extLst>
-                <a:ext uri="{FF2B5EF4-FFF2-40B4-BE49-F238E27FC236}">
-                  <a16:creationId xmlns:a16="http://schemas.microsoft.com/office/drawing/2014/main" id="{3986E712-CE80-3A67-1D0B-7660C77FDEA0}"/>
-                </a:ext>
-              </a:extLst>
-            </p:cNvPr>
-            <p:cNvPicPr>
-              <a:picLocks noChangeAspect="1"/>
-            </p:cNvPicPr>
-            <p:nvPr/>
-          </p:nvPicPr>
-          <p:blipFill>
-            <a:blip r:embed="rId6"/>
-            <a:stretch>
-              <a:fillRect/>
-            </a:stretch>
-          </p:blipFill>
-          <p:spPr>
-            <a:xfrm>
-              <a:off x="6229508" y="3126098"/>
-              <a:ext cx="562940" cy="1017506"/>
-            </a:xfrm>
-            <a:prstGeom prst="rect">
-              <a:avLst/>
-            </a:prstGeom>
-          </p:spPr>
-        </p:pic>
-        <p:pic>
-          <p:nvPicPr>
-            <p:cNvPr id="17" name="Picture 16">
-              <a:extLst>
-                <a:ext uri="{FF2B5EF4-FFF2-40B4-BE49-F238E27FC236}">
-                  <a16:creationId xmlns:a16="http://schemas.microsoft.com/office/drawing/2014/main" id="{9885EB7C-258D-EC44-05E8-403854768456}"/>
-                </a:ext>
-              </a:extLst>
-            </p:cNvPr>
-            <p:cNvPicPr>
-              <a:picLocks noChangeAspect="1"/>
-            </p:cNvPicPr>
-            <p:nvPr/>
-          </p:nvPicPr>
-          <p:blipFill>
-            <a:blip r:embed="rId6"/>
-            <a:stretch>
-              <a:fillRect/>
-            </a:stretch>
-          </p:blipFill>
-          <p:spPr>
-            <a:xfrm flipH="1">
-              <a:off x="5144014" y="3148085"/>
-              <a:ext cx="564163" cy="1019717"/>
-            </a:xfrm>
-            <a:prstGeom prst="rect">
-              <a:avLst/>
-            </a:prstGeom>
-          </p:spPr>
-        </p:pic>
-      </p:grpSp>
-      <p:sp>
-        <p:nvSpPr>
-          <p:cNvPr id="18" name="Rectangle 17">
-            <a:extLst>
-              <a:ext uri="{FF2B5EF4-FFF2-40B4-BE49-F238E27FC236}">
-                <a16:creationId xmlns:a16="http://schemas.microsoft.com/office/drawing/2014/main" id="{D6BC7CDD-2F5E-418F-3623-EDEC485CE32A}"/>
-              </a:ext>
-            </a:extLst>
-          </p:cNvPr>
-          <p:cNvSpPr/>
-          <p:nvPr/>
-        </p:nvSpPr>
-        <p:spPr>
-          <a:xfrm>
-            <a:off x="1021397" y="3569575"/>
-            <a:ext cx="2365960" cy="1879430"/>
-          </a:xfrm>
-          <a:prstGeom prst="rect">
-            <a:avLst/>
-          </a:prstGeom>
-          <a:solidFill>
-            <a:srgbClr val="808080"/>
-          </a:solidFill>
-          <a:ln w="28575">
-            <a:solidFill>
-              <a:schemeClr val="tx1"/>
-            </a:solidFill>
-          </a:ln>
-        </p:spPr>
-        <p:style>
-          <a:lnRef idx="2">
-            <a:schemeClr val="accent1">
-              <a:shade val="50000"/>
-            </a:schemeClr>
-          </a:lnRef>
-          <a:fillRef idx="1">
-            <a:schemeClr val="accent1"/>
-          </a:fillRef>
-          <a:effectRef idx="0">
-            <a:schemeClr val="accent1"/>
-          </a:effectRef>
-          <a:fontRef idx="minor">
-            <a:schemeClr val="lt1"/>
-          </a:fontRef>
-        </p:style>
-        <p:txBody>
-          <a:bodyPr rtlCol="0" anchor="ctr"/>
-          <a:lstStyle/>
-          <a:p>
-            <a:pPr marL="0" algn="ctr" defTabSz="914400" rtl="0" eaLnBrk="1" latinLnBrk="0" hangingPunct="1"/>
-            <a:endParaRPr lang="en-US"/>
-          </a:p>
-        </p:txBody>
-      </p:sp>
-      <p:cxnSp>
-        <p:nvCxnSpPr>
-          <p:cNvPr id="19" name="Straight Arrow Connector 18">
-            <a:extLst>
-              <a:ext uri="{FF2B5EF4-FFF2-40B4-BE49-F238E27FC236}">
-                <a16:creationId xmlns:a16="http://schemas.microsoft.com/office/drawing/2014/main" id="{39B820EC-BDAB-F66F-68FF-75353C84C850}"/>
-              </a:ext>
-            </a:extLst>
-          </p:cNvPr>
-          <p:cNvCxnSpPr>
-            <a:cxnSpLocks/>
-          </p:cNvCxnSpPr>
-          <p:nvPr/>
-        </p:nvCxnSpPr>
-        <p:spPr>
-          <a:xfrm>
-            <a:off x="3387357" y="4499321"/>
-            <a:ext cx="274320" cy="0"/>
-          </a:xfrm>
-          <a:prstGeom prst="straightConnector1">
-            <a:avLst/>
-          </a:prstGeom>
-          <a:ln w="57150">
-            <a:solidFill>
-              <a:schemeClr val="tx1"/>
-            </a:solidFill>
-            <a:tailEnd type="triangle"/>
-          </a:ln>
-        </p:spPr>
-        <p:style>
-          <a:lnRef idx="1">
-            <a:schemeClr val="accent1"/>
-          </a:lnRef>
-          <a:fillRef idx="0">
-            <a:schemeClr val="accent1"/>
-          </a:fillRef>
-          <a:effectRef idx="0">
-            <a:schemeClr val="accent1"/>
-          </a:effectRef>
-          <a:fontRef idx="minor">
-            <a:schemeClr val="tx1"/>
-          </a:fontRef>
-        </p:style>
-      </p:cxnSp>
-      <p:sp>
-        <p:nvSpPr>
-          <p:cNvPr id="20" name="Rectangle 19">
-            <a:extLst>
-              <a:ext uri="{FF2B5EF4-FFF2-40B4-BE49-F238E27FC236}">
-                <a16:creationId xmlns:a16="http://schemas.microsoft.com/office/drawing/2014/main" id="{74C2F54D-CF6F-7195-618F-DF3D0BDBF796}"/>
-              </a:ext>
-            </a:extLst>
-          </p:cNvPr>
-          <p:cNvSpPr/>
-          <p:nvPr/>
-        </p:nvSpPr>
-        <p:spPr>
-          <a:xfrm>
-            <a:off x="1865382" y="4161275"/>
-            <a:ext cx="729949" cy="731520"/>
-          </a:xfrm>
-          <a:prstGeom prst="rect">
-            <a:avLst/>
-          </a:prstGeom>
-          <a:solidFill>
-            <a:schemeClr val="tx1"/>
-          </a:solidFill>
-          <a:ln>
-            <a:noFill/>
-          </a:ln>
-        </p:spPr>
-        <p:style>
-          <a:lnRef idx="2">
-            <a:schemeClr val="accent1">
-              <a:shade val="50000"/>
-            </a:schemeClr>
-          </a:lnRef>
-          <a:fillRef idx="1">
-            <a:schemeClr val="accent1"/>
-          </a:fillRef>
-          <a:effectRef idx="0">
-            <a:schemeClr val="accent1"/>
-          </a:effectRef>
-          <a:fontRef idx="minor">
-            <a:schemeClr val="lt1"/>
-          </a:fontRef>
-        </p:style>
-        <p:txBody>
-          <a:bodyPr rtlCol="0" anchor="ctr"/>
-          <a:lstStyle/>
-          <a:p>
-            <a:pPr algn="ctr"/>
-            <a:endParaRPr lang="en-US"/>
-          </a:p>
-        </p:txBody>
-      </p:sp>
-      <p:pic>
-        <p:nvPicPr>
-          <p:cNvPr id="21" name="Picture 20">
-            <a:extLst>
-              <a:ext uri="{FF2B5EF4-FFF2-40B4-BE49-F238E27FC236}">
-                <a16:creationId xmlns:a16="http://schemas.microsoft.com/office/drawing/2014/main" id="{E06DEE3C-D616-AC06-CA7F-47758755C72D}"/>
-              </a:ext>
-            </a:extLst>
-          </p:cNvPr>
-          <p:cNvPicPr>
-            <a:picLocks noChangeAspect="1"/>
-          </p:cNvPicPr>
-          <p:nvPr/>
-        </p:nvPicPr>
-        <p:blipFill>
-          <a:blip r:embed="rId5"/>
-          <a:stretch>
-            <a:fillRect/>
-          </a:stretch>
-        </p:blipFill>
-        <p:spPr>
-          <a:xfrm>
-            <a:off x="1263963" y="5484250"/>
-            <a:ext cx="1887295" cy="943647"/>
-          </a:xfrm>
-          <a:prstGeom prst="rect">
-            <a:avLst/>
-          </a:prstGeom>
-        </p:spPr>
-      </p:pic>
-      <p:pic>
-        <p:nvPicPr>
-          <p:cNvPr id="22" name="Picture 21">
-            <a:extLst>
-              <a:ext uri="{FF2B5EF4-FFF2-40B4-BE49-F238E27FC236}">
-                <a16:creationId xmlns:a16="http://schemas.microsoft.com/office/drawing/2014/main" id="{295C4272-B8D9-8823-4951-7C33791DA8A6}"/>
-              </a:ext>
-            </a:extLst>
-          </p:cNvPr>
-          <p:cNvPicPr>
-            <a:picLocks noChangeAspect="1"/>
-          </p:cNvPicPr>
-          <p:nvPr/>
-        </p:nvPicPr>
-        <p:blipFill>
-          <a:blip r:embed="rId6"/>
-          <a:stretch>
-            <a:fillRect/>
-          </a:stretch>
-        </p:blipFill>
-        <p:spPr>
-          <a:xfrm>
-            <a:off x="1983319" y="6238311"/>
-            <a:ext cx="321164" cy="580500"/>
+            <a:off x="5016995" y="2284317"/>
+            <a:ext cx="2158009" cy="2289366"/>
           </a:xfrm>
           <a:prstGeom prst="rect">
             <a:avLst/>
@@ -6573,7 +7108,7 @@
     </p:spTree>
     <p:extLst>
       <p:ext uri="{BB962C8B-B14F-4D97-AF65-F5344CB8AC3E}">
-        <p14:creationId xmlns:p14="http://schemas.microsoft.com/office/powerpoint/2010/main" val="3463080705"/>
+        <p14:creationId xmlns:p14="http://schemas.microsoft.com/office/powerpoint/2010/main" val="90626636"/>
       </p:ext>
     </p:extLst>
   </p:cSld>
@@ -6654,10 +7189,10 @@
       </p:sp>
       <p:sp>
         <p:nvSpPr>
-          <p:cNvPr id="8" name="Rectangle 7">
-            <a:extLst>
-              <a:ext uri="{FF2B5EF4-FFF2-40B4-BE49-F238E27FC236}">
-                <a16:creationId xmlns:a16="http://schemas.microsoft.com/office/drawing/2014/main" id="{1FF0DAA0-A0FD-6A46-9490-CA00AB61643F}"/>
+          <p:cNvPr id="3" name="Rectangle 2">
+            <a:extLst>
+              <a:ext uri="{FF2B5EF4-FFF2-40B4-BE49-F238E27FC236}">
+                <a16:creationId xmlns:a16="http://schemas.microsoft.com/office/drawing/2014/main" id="{003FFE66-834B-F04E-8725-B3E647606348}"/>
               </a:ext>
             </a:extLst>
           </p:cNvPr>
@@ -6666,305 +7201,48 @@
         </p:nvSpPr>
         <p:spPr>
           <a:xfrm>
-            <a:off x="716198" y="717214"/>
-            <a:ext cx="10308853" cy="646331"/>
+            <a:off x="4998720" y="2242751"/>
+            <a:ext cx="2194560" cy="2193325"/>
           </a:xfrm>
           <a:prstGeom prst="rect">
             <a:avLst/>
           </a:prstGeom>
-        </p:spPr>
-        <p:txBody>
-          <a:bodyPr wrap="square">
-            <a:spAutoFit/>
-          </a:bodyPr>
+          <a:solidFill>
+            <a:schemeClr val="tx1"/>
+          </a:solidFill>
+          <a:ln>
+            <a:noFill/>
+          </a:ln>
+        </p:spPr>
+        <p:style>
+          <a:lnRef idx="2">
+            <a:schemeClr val="accent1">
+              <a:shade val="50000"/>
+            </a:schemeClr>
+          </a:lnRef>
+          <a:fillRef idx="1">
+            <a:schemeClr val="accent1"/>
+          </a:fillRef>
+          <a:effectRef idx="0">
+            <a:schemeClr val="accent1"/>
+          </a:effectRef>
+          <a:fontRef idx="minor">
+            <a:schemeClr val="lt1"/>
+          </a:fontRef>
+        </p:style>
+        <p:txBody>
+          <a:bodyPr rtlCol="0" anchor="ctr"/>
           <a:lstStyle/>
           <a:p>
             <a:pPr algn="ctr"/>
-            <a:r>
-              <a:rPr lang="en-US" dirty="0">
-                <a:solidFill>
-                  <a:schemeClr val="bg1"/>
-                </a:solidFill>
-                <a:latin typeface="Arial" panose="020B0604020202020204" pitchFamily="34" charset="0"/>
-                <a:cs typeface="Arial" panose="020B0604020202020204" pitchFamily="34" charset="0"/>
-              </a:rPr>
-              <a:t>If you are correct you will see a green mark, if you are incorrect you will see a red cross (see below).</a:t>
-            </a:r>
-          </a:p>
-          <a:p>
-            <a:pPr algn="ctr"/>
-            <a:endParaRPr lang="en-US" dirty="0">
-              <a:solidFill>
-                <a:schemeClr val="bg1"/>
-              </a:solidFill>
-              <a:latin typeface="Arial" panose="020B0604020202020204" pitchFamily="34" charset="0"/>
-              <a:cs typeface="Arial" panose="020B0604020202020204" pitchFamily="34" charset="0"/>
-            </a:endParaRPr>
-          </a:p>
-        </p:txBody>
-      </p:sp>
-      <p:pic>
-        <p:nvPicPr>
-          <p:cNvPr id="5" name="Picture 4">
-            <a:extLst>
-              <a:ext uri="{FF2B5EF4-FFF2-40B4-BE49-F238E27FC236}">
-                <a16:creationId xmlns:a16="http://schemas.microsoft.com/office/drawing/2014/main" id="{3443B4A7-68BB-43E2-9347-5989CDB22A48}"/>
-              </a:ext>
-            </a:extLst>
-          </p:cNvPr>
-          <p:cNvPicPr>
-            <a:picLocks noChangeAspect="1"/>
-          </p:cNvPicPr>
-          <p:nvPr/>
-        </p:nvPicPr>
-        <p:blipFill rotWithShape="1">
-          <a:blip r:embed="rId3"/>
-          <a:srcRect l="14397" r="12612"/>
-          <a:stretch/>
-        </p:blipFill>
-        <p:spPr>
-          <a:xfrm>
-            <a:off x="3303380" y="1781977"/>
-            <a:ext cx="2444278" cy="1883664"/>
-          </a:xfrm>
-          <a:prstGeom prst="rect">
-            <a:avLst/>
-          </a:prstGeom>
-          <a:ln w="28575">
-            <a:solidFill>
-              <a:schemeClr val="tx1"/>
-            </a:solidFill>
-          </a:ln>
-        </p:spPr>
-      </p:pic>
-      <p:pic>
-        <p:nvPicPr>
-          <p:cNvPr id="11" name="Picture 10">
-            <a:extLst>
-              <a:ext uri="{FF2B5EF4-FFF2-40B4-BE49-F238E27FC236}">
-                <a16:creationId xmlns:a16="http://schemas.microsoft.com/office/drawing/2014/main" id="{27B7EFBA-472A-A921-86E9-2A3306347441}"/>
-              </a:ext>
-            </a:extLst>
-          </p:cNvPr>
-          <p:cNvPicPr>
-            <a:picLocks noChangeAspect="1"/>
-          </p:cNvPicPr>
-          <p:nvPr/>
-        </p:nvPicPr>
-        <p:blipFill rotWithShape="1">
-          <a:blip r:embed="rId4"/>
-          <a:srcRect l="13058" r="13950"/>
-          <a:stretch/>
-        </p:blipFill>
-        <p:spPr>
-          <a:xfrm>
-            <a:off x="6096000" y="1759061"/>
-            <a:ext cx="2444278" cy="1883664"/>
-          </a:xfrm>
-          <a:prstGeom prst="rect">
-            <a:avLst/>
-          </a:prstGeom>
-          <a:ln w="28575">
-            <a:solidFill>
-              <a:schemeClr val="tx1"/>
-            </a:solidFill>
-          </a:ln>
-        </p:spPr>
-      </p:pic>
-      <p:sp>
-        <p:nvSpPr>
-          <p:cNvPr id="13" name="Rectangle 12">
-            <a:extLst>
-              <a:ext uri="{FF2B5EF4-FFF2-40B4-BE49-F238E27FC236}">
-                <a16:creationId xmlns:a16="http://schemas.microsoft.com/office/drawing/2014/main" id="{FF4E2701-90D0-8EBF-BB37-CAADF85D0F82}"/>
-              </a:ext>
-            </a:extLst>
-          </p:cNvPr>
-          <p:cNvSpPr/>
-          <p:nvPr/>
-        </p:nvSpPr>
-        <p:spPr>
-          <a:xfrm>
-            <a:off x="522790" y="4070357"/>
-            <a:ext cx="11146420" cy="1754326"/>
-          </a:xfrm>
-          <a:prstGeom prst="rect">
-            <a:avLst/>
-          </a:prstGeom>
-        </p:spPr>
-        <p:txBody>
-          <a:bodyPr wrap="square">
-            <a:spAutoFit/>
-          </a:bodyPr>
-          <a:lstStyle/>
-          <a:p>
-            <a:pPr algn="ctr"/>
-            <a:r>
-              <a:rPr lang="en-US" dirty="0">
-                <a:solidFill>
-                  <a:schemeClr val="bg1"/>
-                </a:solidFill>
-                <a:latin typeface="Arial" panose="020B0604020202020204" pitchFamily="34" charset="0"/>
-                <a:cs typeface="Arial" panose="020B0604020202020204" pitchFamily="34" charset="0"/>
-              </a:rPr>
-              <a:t>You can earn bonus money (up to $4) if you choose the Correct answer.</a:t>
-            </a:r>
-          </a:p>
-          <a:p>
-            <a:pPr algn="ctr"/>
-            <a:endParaRPr lang="en-US" dirty="0">
-              <a:solidFill>
-                <a:schemeClr val="bg1"/>
-              </a:solidFill>
-              <a:latin typeface="Arial" panose="020B0604020202020204" pitchFamily="34" charset="0"/>
-              <a:cs typeface="Arial" panose="020B0604020202020204" pitchFamily="34" charset="0"/>
-            </a:endParaRPr>
-          </a:p>
-          <a:p>
-            <a:pPr algn="ctr"/>
-            <a:r>
-              <a:rPr lang="en-US" dirty="0">
-                <a:solidFill>
-                  <a:schemeClr val="bg1"/>
-                </a:solidFill>
-                <a:latin typeface="Arial" panose="020B0604020202020204" pitchFamily="34" charset="0"/>
-                <a:cs typeface="Arial" panose="020B0604020202020204" pitchFamily="34" charset="0"/>
-              </a:rPr>
-              <a:t>You will have up to 3 seconds to make your decision.</a:t>
-            </a:r>
-          </a:p>
-          <a:p>
-            <a:pPr algn="ctr"/>
-            <a:endParaRPr lang="en-US" dirty="0">
-              <a:solidFill>
-                <a:schemeClr val="bg1"/>
-              </a:solidFill>
-              <a:latin typeface="Arial" panose="020B0604020202020204" pitchFamily="34" charset="0"/>
-              <a:cs typeface="Arial" panose="020B0604020202020204" pitchFamily="34" charset="0"/>
-            </a:endParaRPr>
-          </a:p>
-          <a:p>
-            <a:pPr algn="ctr"/>
-            <a:r>
-              <a:rPr lang="en-US" dirty="0">
-                <a:solidFill>
-                  <a:schemeClr val="bg1"/>
-                </a:solidFill>
-                <a:latin typeface="Arial" panose="020B0604020202020204" pitchFamily="34" charset="0"/>
-                <a:cs typeface="Arial" panose="020B0604020202020204" pitchFamily="34" charset="0"/>
-              </a:rPr>
-              <a:t>If you are too slow to respond, you will see “TOO SLOW” on the screen, </a:t>
-            </a:r>
-          </a:p>
-          <a:p>
-            <a:pPr algn="ctr"/>
-            <a:r>
-              <a:rPr lang="en-US" dirty="0">
-                <a:solidFill>
-                  <a:schemeClr val="bg1"/>
-                </a:solidFill>
-                <a:latin typeface="Arial" panose="020B0604020202020204" pitchFamily="34" charset="0"/>
-                <a:cs typeface="Arial" panose="020B0604020202020204" pitchFamily="34" charset="0"/>
-              </a:rPr>
-              <a:t>your answer will be considered Incorrect and you will not earn bonus money for that decision.  </a:t>
-            </a:r>
-          </a:p>
-        </p:txBody>
-      </p:sp>
-      <p:sp>
-        <p:nvSpPr>
-          <p:cNvPr id="14" name="Rectangle 13">
-            <a:extLst>
-              <a:ext uri="{FF2B5EF4-FFF2-40B4-BE49-F238E27FC236}">
-                <a16:creationId xmlns:a16="http://schemas.microsoft.com/office/drawing/2014/main" id="{DB938466-D0C1-1E66-294B-53BD28A2D9F7}"/>
-              </a:ext>
-            </a:extLst>
-          </p:cNvPr>
-          <p:cNvSpPr/>
-          <p:nvPr/>
-        </p:nvSpPr>
-        <p:spPr>
-          <a:xfrm>
-            <a:off x="3303379" y="1377261"/>
-            <a:ext cx="2444279" cy="646331"/>
-          </a:xfrm>
-          <a:prstGeom prst="rect">
-            <a:avLst/>
-          </a:prstGeom>
-        </p:spPr>
-        <p:txBody>
-          <a:bodyPr wrap="square">
-            <a:spAutoFit/>
-          </a:bodyPr>
-          <a:lstStyle/>
-          <a:p>
-            <a:pPr algn="ctr"/>
-            <a:r>
-              <a:rPr lang="en-US" dirty="0">
-                <a:latin typeface="Arial" panose="020B0604020202020204" pitchFamily="34" charset="0"/>
-                <a:cs typeface="Arial" panose="020B0604020202020204" pitchFamily="34" charset="0"/>
-              </a:rPr>
-              <a:t>Correct</a:t>
-            </a:r>
-          </a:p>
-          <a:p>
-            <a:pPr algn="ctr"/>
-            <a:endParaRPr lang="en-US" dirty="0">
-              <a:latin typeface="Arial" panose="020B0604020202020204" pitchFamily="34" charset="0"/>
-              <a:cs typeface="Arial" panose="020B0604020202020204" pitchFamily="34" charset="0"/>
-            </a:endParaRPr>
-          </a:p>
-        </p:txBody>
-      </p:sp>
-      <p:sp>
-        <p:nvSpPr>
-          <p:cNvPr id="16" name="Rectangle 15">
-            <a:extLst>
-              <a:ext uri="{FF2B5EF4-FFF2-40B4-BE49-F238E27FC236}">
-                <a16:creationId xmlns:a16="http://schemas.microsoft.com/office/drawing/2014/main" id="{FD05AF02-1E11-A6B3-D788-D3F61E351C56}"/>
-              </a:ext>
-            </a:extLst>
-          </p:cNvPr>
-          <p:cNvSpPr/>
-          <p:nvPr/>
-        </p:nvSpPr>
-        <p:spPr>
-          <a:xfrm>
-            <a:off x="6096000" y="1377261"/>
-            <a:ext cx="2444277" cy="646331"/>
-          </a:xfrm>
-          <a:prstGeom prst="rect">
-            <a:avLst/>
-          </a:prstGeom>
-        </p:spPr>
-        <p:txBody>
-          <a:bodyPr wrap="square">
-            <a:spAutoFit/>
-          </a:bodyPr>
-          <a:lstStyle/>
-          <a:p>
-            <a:pPr algn="ctr"/>
-            <a:r>
-              <a:rPr lang="en-US" dirty="0">
-                <a:latin typeface="Arial" panose="020B0604020202020204" pitchFamily="34" charset="0"/>
-                <a:cs typeface="Arial" panose="020B0604020202020204" pitchFamily="34" charset="0"/>
-              </a:rPr>
-              <a:t>Incorrect</a:t>
-            </a:r>
-          </a:p>
-          <a:p>
-            <a:pPr algn="ctr"/>
-            <a:endParaRPr lang="en-US" dirty="0">
-              <a:latin typeface="Arial" panose="020B0604020202020204" pitchFamily="34" charset="0"/>
-              <a:cs typeface="Arial" panose="020B0604020202020204" pitchFamily="34" charset="0"/>
-            </a:endParaRPr>
+            <a:endParaRPr lang="en-US"/>
           </a:p>
         </p:txBody>
       </p:sp>
     </p:spTree>
     <p:extLst>
       <p:ext uri="{BB962C8B-B14F-4D97-AF65-F5344CB8AC3E}">
-        <p14:creationId xmlns:p14="http://schemas.microsoft.com/office/powerpoint/2010/main" val="1521068442"/>
+        <p14:creationId xmlns:p14="http://schemas.microsoft.com/office/powerpoint/2010/main" val="196050107"/>
       </p:ext>
     </p:extLst>
   </p:cSld>

--- a/Task/Stimuli/Instructions/Instructions.pptx
+++ b/Task/Stimuli/Instructions/Instructions.pptx
@@ -4534,7 +4534,7 @@
         <p:spPr>
           <a:xfrm>
             <a:off x="650009" y="654162"/>
-            <a:ext cx="11146420" cy="2031325"/>
+            <a:ext cx="11146420" cy="2585323"/>
           </a:xfrm>
           <a:prstGeom prst="rect">
             <a:avLst/>
@@ -4583,6 +4583,16 @@
           </a:p>
           <a:p>
             <a:pPr algn="ctr"/>
+            <a:endParaRPr lang="en-US" dirty="0">
+              <a:solidFill>
+                <a:schemeClr val="bg1"/>
+              </a:solidFill>
+              <a:latin typeface="Arial" panose="020B0604020202020204" pitchFamily="34" charset="0"/>
+              <a:cs typeface="Arial" panose="020B0604020202020204" pitchFamily="34" charset="0"/>
+            </a:endParaRPr>
+          </a:p>
+          <a:p>
+            <a:pPr algn="ctr"/>
             <a:r>
               <a:rPr lang="en-US" dirty="0">
                 <a:solidFill>
@@ -4591,7 +4601,20 @@
                 <a:latin typeface="Arial" panose="020B0604020202020204" pitchFamily="34" charset="0"/>
                 <a:cs typeface="Arial" panose="020B0604020202020204" pitchFamily="34" charset="0"/>
               </a:rPr>
-              <a:t>Your task is to decide which one is the Correct one. </a:t>
+              <a:t>Two images will appear one after the other, with a “+” in between.</a:t>
+            </a:r>
+          </a:p>
+          <a:p>
+            <a:pPr algn="ctr"/>
+            <a:r>
+              <a:rPr lang="en-US" dirty="0">
+                <a:solidFill>
+                  <a:schemeClr val="bg1"/>
+                </a:solidFill>
+                <a:latin typeface="Arial" panose="020B0604020202020204" pitchFamily="34" charset="0"/>
+                <a:cs typeface="Arial" panose="020B0604020202020204" pitchFamily="34" charset="0"/>
+              </a:rPr>
+              <a:t> When you see the prompt “MAKE A CHOICE”, you may enter either the “D” or “K” keys to make a decision.</a:t>
             </a:r>
           </a:p>
           <a:p>
@@ -4614,21 +4637,18 @@
                 <a:latin typeface="Arial" panose="020B0604020202020204" pitchFamily="34" charset="0"/>
                 <a:cs typeface="Arial" panose="020B0604020202020204" pitchFamily="34" charset="0"/>
               </a:rPr>
-              <a:t>Two images will appear one after the other, with a “+” in between.</a:t>
+              <a:t>You will learn how to choose “D” vs. “K” correctly on your own</a:t>
             </a:r>
           </a:p>
           <a:p>
             <a:pPr algn="ctr"/>
-            <a:r>
-              <a:rPr lang="en-US" dirty="0">
-                <a:solidFill>
-                  <a:schemeClr val="bg1"/>
-                </a:solidFill>
-                <a:latin typeface="Arial" panose="020B0604020202020204" pitchFamily="34" charset="0"/>
-                <a:cs typeface="Arial" panose="020B0604020202020204" pitchFamily="34" charset="0"/>
-              </a:rPr>
-              <a:t> When you see the prompt “MAKE A CHOICE”, you may enter either the “D” or “K” keys to make a decision.</a:t>
-            </a:r>
+            <a:endParaRPr lang="en-US" dirty="0">
+              <a:solidFill>
+                <a:schemeClr val="bg1"/>
+              </a:solidFill>
+              <a:latin typeface="Arial" panose="020B0604020202020204" pitchFamily="34" charset="0"/>
+              <a:cs typeface="Arial" panose="020B0604020202020204" pitchFamily="34" charset="0"/>
+            </a:endParaRPr>
           </a:p>
         </p:txBody>
       </p:sp>
@@ -5493,6 +5513,16 @@
           </a:p>
           <a:p>
             <a:pPr algn="ctr"/>
+            <a:endParaRPr lang="en-US" dirty="0">
+              <a:solidFill>
+                <a:schemeClr val="bg1"/>
+              </a:solidFill>
+              <a:latin typeface="Arial" panose="020B0604020202020204" pitchFamily="34" charset="0"/>
+              <a:cs typeface="Arial" panose="020B0604020202020204" pitchFamily="34" charset="0"/>
+            </a:endParaRPr>
+          </a:p>
+          <a:p>
+            <a:pPr algn="ctr"/>
             <a:r>
               <a:rPr lang="en-US" dirty="0">
                 <a:solidFill>
@@ -5501,7 +5531,20 @@
                 <a:latin typeface="Arial" panose="020B0604020202020204" pitchFamily="34" charset="0"/>
                 <a:cs typeface="Arial" panose="020B0604020202020204" pitchFamily="34" charset="0"/>
               </a:rPr>
-              <a:t>Your task is to decide which one is the Correct one. </a:t>
+              <a:t>When the black square appears on the screen, you will have 2 seconds to press the SPACE bar. </a:t>
+            </a:r>
+          </a:p>
+          <a:p>
+            <a:pPr algn="ctr"/>
+            <a:r>
+              <a:rPr lang="en-US" dirty="0">
+                <a:solidFill>
+                  <a:schemeClr val="bg1"/>
+                </a:solidFill>
+                <a:latin typeface="Arial" panose="020B0604020202020204" pitchFamily="34" charset="0"/>
+                <a:cs typeface="Arial" panose="020B0604020202020204" pitchFamily="34" charset="0"/>
+              </a:rPr>
+              <a:t>Then, two images will appear one after the other, with a “+” in between.</a:t>
             </a:r>
           </a:p>
           <a:p>
@@ -5524,7 +5567,7 @@
                 <a:latin typeface="Arial" panose="020B0604020202020204" pitchFamily="34" charset="0"/>
                 <a:cs typeface="Arial" panose="020B0604020202020204" pitchFamily="34" charset="0"/>
               </a:rPr>
-              <a:t>When the black square appears on the screen, you will have 2 seconds to press the SPACE bar. </a:t>
+              <a:t> When you see the prompt “MAKE A CHOICE”, you may enter either the “D” or “K” keys to make a decision.</a:t>
             </a:r>
           </a:p>
           <a:p>
@@ -5537,30 +5580,7 @@
                 <a:latin typeface="Arial" panose="020B0604020202020204" pitchFamily="34" charset="0"/>
                 <a:cs typeface="Arial" panose="020B0604020202020204" pitchFamily="34" charset="0"/>
               </a:rPr>
-              <a:t>Then, two images will appear one after the other, with a “+” in between.</a:t>
-            </a:r>
-          </a:p>
-          <a:p>
-            <a:pPr algn="ctr"/>
-            <a:endParaRPr lang="en-US" dirty="0">
-              <a:solidFill>
-                <a:schemeClr val="bg1"/>
-              </a:solidFill>
-              <a:latin typeface="Arial" panose="020B0604020202020204" pitchFamily="34" charset="0"/>
-              <a:cs typeface="Arial" panose="020B0604020202020204" pitchFamily="34" charset="0"/>
-            </a:endParaRPr>
-          </a:p>
-          <a:p>
-            <a:pPr algn="ctr"/>
-            <a:r>
-              <a:rPr lang="en-US" dirty="0">
-                <a:solidFill>
-                  <a:schemeClr val="bg1"/>
-                </a:solidFill>
-                <a:latin typeface="Arial" panose="020B0604020202020204" pitchFamily="34" charset="0"/>
-                <a:cs typeface="Arial" panose="020B0604020202020204" pitchFamily="34" charset="0"/>
-              </a:rPr>
-              <a:t> When you see the prompt “MAKE A CHOICE”, you may enter either the “D” or “K” keys to make a decision.</a:t>
+              <a:t>You will learn how to choose “D” vs. “K” correctly on your own</a:t>
             </a:r>
           </a:p>
         </p:txBody>
@@ -6727,7 +6747,7 @@
                 <a:latin typeface="Arial" panose="020B0604020202020204" pitchFamily="34" charset="0"/>
                 <a:cs typeface="Arial" panose="020B0604020202020204" pitchFamily="34" charset="0"/>
               </a:rPr>
-              <a:t>You can earn bonus money (up to $10) if you choose the Correct answer.</a:t>
+              <a:t>You can earn bonus money (up to $10) the more you choose the Correct answer.</a:t>
             </a:r>
           </a:p>
           <a:p>

--- a/Task/Stimuli/Instructions/Instructions.pptx
+++ b/Task/Stimuli/Instructions/Instructions.pptx
@@ -4339,7 +4339,7 @@
         <p:spPr>
           <a:xfrm>
             <a:off x="650009" y="654162"/>
-            <a:ext cx="11146420" cy="2031325"/>
+            <a:ext cx="11146420" cy="1754326"/>
           </a:xfrm>
           <a:prstGeom prst="rect">
             <a:avLst/>
@@ -4384,19 +4384,6 @@
                 <a:cs typeface="Arial" panose="020B0604020202020204" pitchFamily="34" charset="0"/>
               </a:rPr>
               <a:t>In this experiment, we will show you pairs of images presented one after the other. </a:t>
-            </a:r>
-          </a:p>
-          <a:p>
-            <a:pPr algn="ctr"/>
-            <a:r>
-              <a:rPr lang="en-US" dirty="0">
-                <a:solidFill>
-                  <a:schemeClr val="bg1"/>
-                </a:solidFill>
-                <a:latin typeface="Arial" panose="020B0604020202020204" pitchFamily="34" charset="0"/>
-                <a:cs typeface="Arial" panose="020B0604020202020204" pitchFamily="34" charset="0"/>
-              </a:rPr>
-              <a:t>Your task is to decide which one is the Correct one. </a:t>
             </a:r>
           </a:p>
           <a:p>
